--- a/curriculum/M01/W03/L03/slides.pptx
+++ b/curriculum/M01/W03/L03/slides.pptx
@@ -31,6 +31,8 @@
     <p:sldId id="279" r:id="rId31"/>
     <p:sldId id="280" r:id="rId32"/>
     <p:sldId id="281" r:id="rId33"/>
+    <p:sldId id="282" r:id="rId34"/>
+    <p:sldId id="283" r:id="rId35"/>
   </p:sldIdLst>
   <p:sldSz cx="12191695" cy="6858000" type="screen4x3"/>
   <p:notesSz cx="6858000" cy="9144000"/>
@@ -3820,7 +3822,7 @@
                 <a:ea typeface="Malgun Gothic"/>
                 <a:cs typeface="Malgun Gothic"/>
               </a:rPr>
-              <a:t>전체 15절 가운데 8절</a:t>
+              <a:t>전체 15절 가운데 9절</a:t>
             </a:r>
           </a:p>
           <a:p>
@@ -12221,7 +12223,7 @@
                 <a:ea typeface="Malgun Gothic"/>
                 <a:cs typeface="Malgun Gothic"/>
               </a:rPr>
-              <a:t>REFERENCES   </a:t>
+              <a:t>09   </a:t>
             </a:r>
             <a:r>
               <a:rPr sz="2400" b="1" i="0">
@@ -12232,7 +12234,7 @@
                 <a:ea typeface="Malgun Gothic"/>
                 <a:cs typeface="Malgun Gothic"/>
               </a:rPr>
-              <a:t>참고문헌</a:t>
+              <a:t>9. 근육과 뼈 — 움직임의 역학</a:t>
             </a:r>
           </a:p>
         </p:txBody>
@@ -12280,6 +12282,1272 @@
                 <a:cs typeface="Malgun Gothic"/>
               </a:rPr>
               <a:t>      26</a:t>
+            </a:r>
+          </a:p>
+        </p:txBody>
+      </p:sp>
+      <p:sp>
+        <p:nvSpPr>
+          <p:cNvPr id="7" name="TextBox 6"/>
+          <p:cNvSpPr txBox="1"/>
+          <p:nvPr/>
+        </p:nvSpPr>
+        <p:spPr>
+          <a:xfrm>
+            <a:off x="640080" y="1280160"/>
+            <a:ext cx="10881360" cy="5029200"/>
+          </a:xfrm>
+          <a:prstGeom prst="rect">
+            <a:avLst/>
+          </a:prstGeom>
+          <a:noFill/>
+        </p:spPr>
+        <p:txBody>
+          <a:bodyPr wrap="square" anchor="t">
+            <a:spAutoFit/>
+          </a:bodyPr>
+          <a:lstStyle/>
+          <a:p>
+            <a:pPr>
+              <a:spcAft>
+                <a:spcPts val="900"/>
+              </a:spcAft>
+            </a:pPr>
+            <a:r>
+              <a:rPr sz="1400" b="1" i="0">
+                <a:solidFill>
+                  <a:srgbClr val="F2B705"/>
+                </a:solidFill>
+                <a:latin typeface="Malgun Gothic"/>
+                <a:ea typeface="Malgun Gothic"/>
+                <a:cs typeface="Malgun Gothic"/>
+              </a:rPr>
+              <a:t>•  </a:t>
+            </a:r>
+            <a:r>
+              <a:rPr sz="1400" b="0" i="0">
+                <a:solidFill>
+                  <a:srgbClr val="11202B"/>
+                </a:solidFill>
+                <a:latin typeface="Malgun Gothic"/>
+                <a:ea typeface="Malgun Gothic"/>
+                <a:cs typeface="Malgun Gothic"/>
+              </a:rPr>
+              <a:t>근육이 내는 힘이 곧 몸이 내는 힘은 아니다. 힘은 </a:t>
+            </a:r>
+            <a:r>
+              <a:rPr sz="1400" b="1" i="0">
+                <a:solidFill>
+                  <a:srgbClr val="11202B"/>
+                </a:solidFill>
+                <a:latin typeface="Malgun Gothic"/>
+                <a:ea typeface="Malgun Gothic"/>
+                <a:cs typeface="Malgun Gothic"/>
+              </a:rPr>
+              <a:t>뼈라는 지렛대</a:t>
+            </a:r>
+            <a:r>
+              <a:rPr sz="1400" b="0" i="0">
+                <a:solidFill>
+                  <a:srgbClr val="11202B"/>
+                </a:solidFill>
+                <a:latin typeface="Malgun Gothic"/>
+                <a:ea typeface="Malgun Gothic"/>
+                <a:cs typeface="Malgun Gothic"/>
+              </a:rPr>
+              <a:t>를 통해 전달되며, 그 과정에서 크기와 속도가 교환된다.</a:t>
+            </a:r>
+          </a:p>
+          <a:p>
+            <a:pPr>
+              <a:spcAft>
+                <a:spcPts val="900"/>
+              </a:spcAft>
+            </a:pPr>
+            <a:r>
+              <a:rPr sz="1400" b="1" i="0">
+                <a:solidFill>
+                  <a:srgbClr val="F2B705"/>
+                </a:solidFill>
+                <a:latin typeface="Malgun Gothic"/>
+                <a:ea typeface="Malgun Gothic"/>
+                <a:cs typeface="Malgun Gothic"/>
+              </a:rPr>
+              <a:t>•  </a:t>
+            </a:r>
+            <a:r>
+              <a:rPr sz="1400" b="1" i="0">
+                <a:solidFill>
+                  <a:srgbClr val="11202B"/>
+                </a:solidFill>
+                <a:latin typeface="Malgun Gothic"/>
+                <a:ea typeface="Malgun Gothic"/>
+                <a:cs typeface="Malgun Gothic"/>
+              </a:rPr>
+              <a:t>지렛대의 세 종류.</a:t>
+            </a:r>
+            <a:r>
+              <a:rPr sz="1400" b="0" i="0">
+                <a:solidFill>
+                  <a:srgbClr val="11202B"/>
+                </a:solidFill>
+                <a:latin typeface="Malgun Gothic"/>
+                <a:ea typeface="Malgun Gothic"/>
+                <a:cs typeface="Malgun Gothic"/>
+              </a:rPr>
+              <a:t> 관절이 받침점, 근육이 힘점, 부하가 작용점이다. 셋의 배치에 따라 세 종류로 나뉜다.</a:t>
+            </a:r>
+          </a:p>
+          <a:p>
+            <a:pPr>
+              <a:spcAft>
+                <a:spcPts val="900"/>
+              </a:spcAft>
+            </a:pPr>
+            <a:r>
+              <a:rPr sz="1400" b="1" i="0">
+                <a:solidFill>
+                  <a:srgbClr val="F2B705"/>
+                </a:solidFill>
+                <a:latin typeface="Malgun Gothic"/>
+                <a:ea typeface="Malgun Gothic"/>
+                <a:cs typeface="Malgun Gothic"/>
+              </a:rPr>
+              <a:t>•  </a:t>
+            </a:r>
+            <a:r>
+              <a:rPr sz="1400" b="1" i="0">
+                <a:solidFill>
+                  <a:srgbClr val="11202B"/>
+                </a:solidFill>
+                <a:latin typeface="Malgun Gothic"/>
+                <a:ea typeface="Malgun Gothic"/>
+                <a:cs typeface="Malgun Gothic"/>
+              </a:rPr>
+              <a:t>1종</a:t>
+            </a:r>
+            <a:r>
+              <a:rPr sz="1400" b="0" i="0">
+                <a:solidFill>
+                  <a:srgbClr val="11202B"/>
+                </a:solidFill>
+                <a:latin typeface="Malgun Gothic"/>
+                <a:ea typeface="Malgun Gothic"/>
+                <a:cs typeface="Malgun Gothic"/>
+              </a:rPr>
+              <a:t>: 받침점이 가운데. 목뼈 위에서 머리를 뒤로 젖히는 뒤통수 근육이 그렇다.</a:t>
+            </a:r>
+          </a:p>
+          <a:p>
+            <a:pPr>
+              <a:spcAft>
+                <a:spcPts val="900"/>
+              </a:spcAft>
+            </a:pPr>
+            <a:r>
+              <a:rPr sz="1400" b="1" i="0">
+                <a:solidFill>
+                  <a:srgbClr val="F2B705"/>
+                </a:solidFill>
+                <a:latin typeface="Malgun Gothic"/>
+                <a:ea typeface="Malgun Gothic"/>
+                <a:cs typeface="Malgun Gothic"/>
+              </a:rPr>
+              <a:t>•  </a:t>
+            </a:r>
+            <a:r>
+              <a:rPr sz="1400" b="1" i="0">
+                <a:solidFill>
+                  <a:srgbClr val="11202B"/>
+                </a:solidFill>
+                <a:latin typeface="Malgun Gothic"/>
+                <a:ea typeface="Malgun Gothic"/>
+                <a:cs typeface="Malgun Gothic"/>
+              </a:rPr>
+              <a:t>2종</a:t>
+            </a:r>
+            <a:r>
+              <a:rPr sz="1400" b="0" i="0">
+                <a:solidFill>
+                  <a:srgbClr val="11202B"/>
+                </a:solidFill>
+                <a:latin typeface="Malgun Gothic"/>
+                <a:ea typeface="Malgun Gothic"/>
+                <a:cs typeface="Malgun Gothic"/>
+              </a:rPr>
+              <a:t>: 부하가 가운데. 발끝으로 서는 동작에서 발허리발가락관절이 받침점, 몸무게가 부하, 장딴지근이 힘점이다. 힘에서 이득을 본다.</a:t>
+            </a:r>
+          </a:p>
+          <a:p>
+            <a:pPr>
+              <a:spcAft>
+                <a:spcPts val="900"/>
+              </a:spcAft>
+            </a:pPr>
+            <a:r>
+              <a:rPr sz="1400" b="1" i="0">
+                <a:solidFill>
+                  <a:srgbClr val="F2B705"/>
+                </a:solidFill>
+                <a:latin typeface="Malgun Gothic"/>
+                <a:ea typeface="Malgun Gothic"/>
+                <a:cs typeface="Malgun Gothic"/>
+              </a:rPr>
+              <a:t>•  </a:t>
+            </a:r>
+            <a:r>
+              <a:rPr sz="1400" b="1" i="0">
+                <a:solidFill>
+                  <a:srgbClr val="11202B"/>
+                </a:solidFill>
+                <a:latin typeface="Malgun Gothic"/>
+                <a:ea typeface="Malgun Gothic"/>
+                <a:cs typeface="Malgun Gothic"/>
+              </a:rPr>
+              <a:t>3종</a:t>
+            </a:r>
+            <a:r>
+              <a:rPr sz="1400" b="0" i="0">
+                <a:solidFill>
+                  <a:srgbClr val="11202B"/>
+                </a:solidFill>
+                <a:latin typeface="Malgun Gothic"/>
+                <a:ea typeface="Malgun Gothic"/>
+                <a:cs typeface="Malgun Gothic"/>
+              </a:rPr>
+              <a:t>: 힘점이 가운데. </a:t>
+            </a:r>
+            <a:r>
+              <a:rPr sz="1400" b="1" i="0">
+                <a:solidFill>
+                  <a:srgbClr val="11202B"/>
+                </a:solidFill>
+                <a:latin typeface="Malgun Gothic"/>
+                <a:ea typeface="Malgun Gothic"/>
+                <a:cs typeface="Malgun Gothic"/>
+              </a:rPr>
+              <a:t>몸에서 가장 흔한 형태</a:t>
+            </a:r>
+            <a:r>
+              <a:rPr sz="1400" b="0" i="0">
+                <a:solidFill>
+                  <a:srgbClr val="11202B"/>
+                </a:solidFill>
+                <a:latin typeface="Malgun Gothic"/>
+                <a:ea typeface="Malgun Gothic"/>
+                <a:cs typeface="Malgun Gothic"/>
+              </a:rPr>
+              <a:t>다. 팔꿈치를 굽히는 위팔두갈래근이 전형으로, 근육이 붙는 자리가 관절에 매우 가깝다.</a:t>
+            </a:r>
+          </a:p>
+          <a:p>
+            <a:pPr>
+              <a:spcAft>
+                <a:spcPts val="900"/>
+              </a:spcAft>
+            </a:pPr>
+            <a:r>
+              <a:rPr sz="1400" b="1" i="0">
+                <a:solidFill>
+                  <a:srgbClr val="F2B705"/>
+                </a:solidFill>
+                <a:latin typeface="Malgun Gothic"/>
+                <a:ea typeface="Malgun Gothic"/>
+                <a:cs typeface="Malgun Gothic"/>
+              </a:rPr>
+              <a:t>•  </a:t>
+            </a:r>
+            <a:r>
+              <a:rPr sz="1400" b="0" i="0">
+                <a:solidFill>
+                  <a:srgbClr val="11202B"/>
+                </a:solidFill>
+                <a:latin typeface="Malgun Gothic"/>
+                <a:ea typeface="Malgun Gothic"/>
+                <a:cs typeface="Malgun Gothic"/>
+              </a:rPr>
+              <a:t>3종 지렛대가 흔하다는 사실이 중요한 결과를 낳는다. 근육의 부착점이 관절에 가까우므로 </a:t>
+            </a:r>
+            <a:r>
+              <a:rPr sz="1400" b="1" i="0">
+                <a:solidFill>
+                  <a:srgbClr val="11202B"/>
+                </a:solidFill>
+                <a:latin typeface="Malgun Gothic"/>
+                <a:ea typeface="Malgun Gothic"/>
+                <a:cs typeface="Malgun Gothic"/>
+              </a:rPr>
+              <a:t>모멘트 팔이 짧고</a:t>
+            </a:r>
+            <a:r>
+              <a:rPr sz="1400" b="0" i="0">
+                <a:solidFill>
+                  <a:srgbClr val="11202B"/>
+                </a:solidFill>
+                <a:latin typeface="Malgun Gothic"/>
+                <a:ea typeface="Malgun Gothic"/>
+                <a:cs typeface="Malgun Gothic"/>
+              </a:rPr>
+              <a:t>, 따라서 근육은 부하보다 훨씬 </a:t>
+            </a:r>
+            <a:r>
+              <a:rPr sz="1400" b="1" i="0">
+                <a:solidFill>
+                  <a:srgbClr val="11202B"/>
+                </a:solidFill>
+                <a:latin typeface="Malgun Gothic"/>
+                <a:ea typeface="Malgun Gothic"/>
+                <a:cs typeface="Malgun Gothic"/>
+              </a:rPr>
+              <a:t>큰 힘</a:t>
+            </a:r>
+            <a:r>
+              <a:rPr sz="1400" b="0" i="0">
+                <a:solidFill>
+                  <a:srgbClr val="11202B"/>
+                </a:solidFill>
+                <a:latin typeface="Malgun Gothic"/>
+                <a:ea typeface="Malgun Gothic"/>
+                <a:cs typeface="Malgun Gothic"/>
+              </a:rPr>
+              <a:t>을 내야 한다. 손에 5 kg을 들고 있을 때 위팔두갈래근은 수십 kg에 해당하는 힘을 낸다. 역학적으로는 손해다.</a:t>
+            </a:r>
+          </a:p>
+          <a:p>
+            <a:pPr>
+              <a:spcAft>
+                <a:spcPts val="900"/>
+              </a:spcAft>
+            </a:pPr>
+            <a:r>
+              <a:rPr sz="1400" b="1" i="0">
+                <a:solidFill>
+                  <a:srgbClr val="F2B705"/>
+                </a:solidFill>
+                <a:latin typeface="Malgun Gothic"/>
+                <a:ea typeface="Malgun Gothic"/>
+                <a:cs typeface="Malgun Gothic"/>
+              </a:rPr>
+              <a:t>•  </a:t>
+            </a:r>
+            <a:r>
+              <a:rPr sz="1400" b="0" i="0">
+                <a:solidFill>
+                  <a:srgbClr val="11202B"/>
+                </a:solidFill>
+                <a:latin typeface="Malgun Gothic"/>
+                <a:ea typeface="Malgun Gothic"/>
+                <a:cs typeface="Malgun Gothic"/>
+              </a:rPr>
+              <a:t>그런데 이 설계가 선택된 이유가 있다. 손해를 보는 대신 얻는 것이 </a:t>
+            </a:r>
+            <a:r>
+              <a:rPr sz="1400" b="1" i="0">
+                <a:solidFill>
+                  <a:srgbClr val="11202B"/>
+                </a:solidFill>
+                <a:latin typeface="Malgun Gothic"/>
+                <a:ea typeface="Malgun Gothic"/>
+                <a:cs typeface="Malgun Gothic"/>
+              </a:rPr>
+              <a:t>속도와 운동 범위</a:t>
+            </a:r>
+            <a:r>
+              <a:rPr sz="1400" b="0" i="0">
+                <a:solidFill>
+                  <a:srgbClr val="11202B"/>
+                </a:solidFill>
+                <a:latin typeface="Malgun Gothic"/>
+                <a:ea typeface="Malgun Gothic"/>
+                <a:cs typeface="Malgun Gothic"/>
+              </a:rPr>
+              <a:t>다. 근육이 조금만 짧아져도 손끝은 크게 움직인다. 근육이 1 cm 수축할 때 손은 10 cm 이상 이동한다. 몸이 필요로 한 것은 무거운 것을 천천히 드는 능력이 아니라 </a:t>
+            </a:r>
+            <a:r>
+              <a:rPr sz="1400" b="1" i="0">
+                <a:solidFill>
+                  <a:srgbClr val="11202B"/>
+                </a:solidFill>
+                <a:latin typeface="Malgun Gothic"/>
+                <a:ea typeface="Malgun Gothic"/>
+                <a:cs typeface="Malgun Gothic"/>
+              </a:rPr>
+              <a:t>팔다리를 빠르게 휘두르는 능력</a:t>
+            </a:r>
+            <a:r>
+              <a:rPr sz="1400" b="0" i="0">
+                <a:solidFill>
+                  <a:srgbClr val="11202B"/>
+                </a:solidFill>
+                <a:latin typeface="Malgun Gothic"/>
+                <a:ea typeface="Malgun Gothic"/>
+                <a:cs typeface="Malgun Gothic"/>
+              </a:rPr>
+              <a:t>이었다는 뜻이다.</a:t>
+            </a:r>
+          </a:p>
+          <a:p>
+            <a:pPr>
+              <a:spcAft>
+                <a:spcPts val="900"/>
+              </a:spcAft>
+            </a:pPr>
+            <a:r>
+              <a:rPr sz="1400" b="1" i="0">
+                <a:solidFill>
+                  <a:srgbClr val="F2B705"/>
+                </a:solidFill>
+                <a:latin typeface="Malgun Gothic"/>
+                <a:ea typeface="Malgun Gothic"/>
+                <a:cs typeface="Malgun Gothic"/>
+              </a:rPr>
+              <a:t>•  </a:t>
+            </a:r>
+            <a:r>
+              <a:rPr sz="1400" b="1" i="0">
+                <a:solidFill>
+                  <a:srgbClr val="11202B"/>
+                </a:solidFill>
+                <a:latin typeface="Malgun Gothic"/>
+                <a:ea typeface="Malgun Gothic"/>
+                <a:cs typeface="Malgun Gothic"/>
+              </a:rPr>
+              <a:t>근육의 배열.</a:t>
+            </a:r>
+            <a:r>
+              <a:rPr sz="1400" b="0" i="0">
+                <a:solidFill>
+                  <a:srgbClr val="11202B"/>
+                </a:solidFill>
+                <a:latin typeface="Malgun Gothic"/>
+                <a:ea typeface="Malgun Gothic"/>
+                <a:cs typeface="Malgun Gothic"/>
+              </a:rPr>
+              <a:t> 같은 부피의 근육이라도 섬유의 배열에 따라 성질이 달라진다.</a:t>
+            </a:r>
+          </a:p>
+          <a:p>
+            <a:pPr>
+              <a:spcAft>
+                <a:spcPts val="900"/>
+              </a:spcAft>
+            </a:pPr>
+            <a:r>
+              <a:rPr sz="1400" b="1" i="0">
+                <a:solidFill>
+                  <a:srgbClr val="F2B705"/>
+                </a:solidFill>
+                <a:latin typeface="Malgun Gothic"/>
+                <a:ea typeface="Malgun Gothic"/>
+                <a:cs typeface="Malgun Gothic"/>
+              </a:rPr>
+              <a:t>•  </a:t>
+            </a:r>
+            <a:r>
+              <a:rPr sz="1400" b="1" i="0">
+                <a:solidFill>
+                  <a:srgbClr val="11202B"/>
+                </a:solidFill>
+                <a:latin typeface="Malgun Gothic"/>
+                <a:ea typeface="Malgun Gothic"/>
+                <a:cs typeface="Malgun Gothic"/>
+              </a:rPr>
+              <a:t>평행 배열</a:t>
+            </a:r>
+            <a:r>
+              <a:rPr sz="1400" b="0" i="0">
+                <a:solidFill>
+                  <a:srgbClr val="11202B"/>
+                </a:solidFill>
+                <a:latin typeface="Malgun Gothic"/>
+                <a:ea typeface="Malgun Gothic"/>
+                <a:cs typeface="Malgun Gothic"/>
+              </a:rPr>
+              <a:t>: 섬유가 근육의 긴 축과 나란하다. 섬유가 길어 </a:t>
+            </a:r>
+            <a:r>
+              <a:rPr sz="1400" b="1" i="0">
+                <a:solidFill>
+                  <a:srgbClr val="11202B"/>
+                </a:solidFill>
+                <a:latin typeface="Malgun Gothic"/>
+                <a:ea typeface="Malgun Gothic"/>
+                <a:cs typeface="Malgun Gothic"/>
+              </a:rPr>
+              <a:t>수축 거리와 속도</a:t>
+            </a:r>
+            <a:r>
+              <a:rPr sz="1400" b="0" i="0">
+                <a:solidFill>
+                  <a:srgbClr val="11202B"/>
+                </a:solidFill>
+                <a:latin typeface="Malgun Gothic"/>
+                <a:ea typeface="Malgun Gothic"/>
+                <a:cs typeface="Malgun Gothic"/>
+              </a:rPr>
+              <a:t>에서 유리하다. 넙다리빗근이 그렇다.</a:t>
+            </a:r>
+          </a:p>
+          <a:p>
+            <a:pPr>
+              <a:spcAft>
+                <a:spcPts val="900"/>
+              </a:spcAft>
+            </a:pPr>
+            <a:r>
+              <a:rPr sz="1400" b="1" i="0">
+                <a:solidFill>
+                  <a:srgbClr val="F2B705"/>
+                </a:solidFill>
+                <a:latin typeface="Malgun Gothic"/>
+                <a:ea typeface="Malgun Gothic"/>
+                <a:cs typeface="Malgun Gothic"/>
+              </a:rPr>
+              <a:t>•  </a:t>
+            </a:r>
+            <a:r>
+              <a:rPr sz="1400" b="1" i="0">
+                <a:solidFill>
+                  <a:srgbClr val="11202B"/>
+                </a:solidFill>
+                <a:latin typeface="Malgun Gothic"/>
+                <a:ea typeface="Malgun Gothic"/>
+                <a:cs typeface="Malgun Gothic"/>
+              </a:rPr>
+              <a:t>깃 배열(pennate)</a:t>
+            </a:r>
+            <a:r>
+              <a:rPr sz="1400" b="0" i="0">
+                <a:solidFill>
+                  <a:srgbClr val="11202B"/>
+                </a:solidFill>
+                <a:latin typeface="Malgun Gothic"/>
+                <a:ea typeface="Malgun Gothic"/>
+                <a:cs typeface="Malgun Gothic"/>
+              </a:rPr>
+              <a:t>: 섬유가 힘줄에 비스듬히 붙는다. 같은 부피에 더 많은 섬유를 채울 수 있어 </a:t>
+            </a:r>
+            <a:r>
+              <a:rPr sz="1400" b="1" i="0">
+                <a:solidFill>
+                  <a:srgbClr val="11202B"/>
+                </a:solidFill>
+                <a:latin typeface="Malgun Gothic"/>
+                <a:ea typeface="Malgun Gothic"/>
+                <a:cs typeface="Malgun Gothic"/>
+              </a:rPr>
+              <a:t>생리적 단면적이 커지고 힘</a:t>
+            </a:r>
+            <a:r>
+              <a:rPr sz="1400" b="0" i="0">
+                <a:solidFill>
+                  <a:srgbClr val="11202B"/>
+                </a:solidFill>
+                <a:latin typeface="Malgun Gothic"/>
+                <a:ea typeface="Malgun Gothic"/>
+                <a:cs typeface="Malgun Gothic"/>
+              </a:rPr>
+              <a:t>에서 유리하다. 대신 섬유가 짧아 수축 거리가 줄고, 비스듬한 각도 때문에 힘의 일부가 손실된다. 넙다리곧은근과 장딴지근이 그렇다.</a:t>
+            </a:r>
+          </a:p>
+          <a:p>
+            <a:pPr>
+              <a:spcAft>
+                <a:spcPts val="900"/>
+              </a:spcAft>
+            </a:pPr>
+            <a:r>
+              <a:rPr sz="1400" b="1" i="0">
+                <a:solidFill>
+                  <a:srgbClr val="F2B705"/>
+                </a:solidFill>
+                <a:latin typeface="Malgun Gothic"/>
+                <a:ea typeface="Malgun Gothic"/>
+                <a:cs typeface="Malgun Gothic"/>
+              </a:rPr>
+              <a:t>•  </a:t>
+            </a:r>
+            <a:r>
+              <a:rPr sz="1400" b="0" i="0">
+                <a:solidFill>
+                  <a:srgbClr val="11202B"/>
+                </a:solidFill>
+                <a:latin typeface="Malgun Gothic"/>
+                <a:ea typeface="Malgun Gothic"/>
+                <a:cs typeface="Malgun Gothic"/>
+              </a:rPr>
+              <a:t>근육이 내는 최대 힘은 부피가 아니라 </a:t>
+            </a:r>
+            <a:r>
+              <a:rPr sz="1400" b="1" i="0">
+                <a:solidFill>
+                  <a:srgbClr val="11202B"/>
+                </a:solidFill>
+                <a:latin typeface="Malgun Gothic"/>
+                <a:ea typeface="Malgun Gothic"/>
+                <a:cs typeface="Malgun Gothic"/>
+              </a:rPr>
+              <a:t>생리적 단면적</a:t>
+            </a:r>
+            <a:r>
+              <a:rPr sz="1400" b="0" i="0">
+                <a:solidFill>
+                  <a:srgbClr val="11202B"/>
+                </a:solidFill>
+                <a:latin typeface="Malgun Gothic"/>
+                <a:ea typeface="Malgun Gothic"/>
+                <a:cs typeface="Malgun Gothic"/>
+              </a:rPr>
+              <a:t>, 즉 모든 섬유를 가로지르는 단면의 합에 비례한다. 깃 배열이 힘에서 유리한 이유가 이 때문이다.</a:t>
+            </a:r>
+          </a:p>
+          <a:p>
+            <a:pPr>
+              <a:spcAft>
+                <a:spcPts val="900"/>
+              </a:spcAft>
+            </a:pPr>
+            <a:r>
+              <a:rPr sz="1400" b="1" i="0">
+                <a:solidFill>
+                  <a:srgbClr val="F2B705"/>
+                </a:solidFill>
+                <a:latin typeface="Malgun Gothic"/>
+                <a:ea typeface="Malgun Gothic"/>
+                <a:cs typeface="Malgun Gothic"/>
+              </a:rPr>
+              <a:t>•  </a:t>
+            </a:r>
+            <a:r>
+              <a:rPr sz="1400" b="1" i="0">
+                <a:solidFill>
+                  <a:srgbClr val="11202B"/>
+                </a:solidFill>
+                <a:latin typeface="Malgun Gothic"/>
+                <a:ea typeface="Malgun Gothic"/>
+                <a:cs typeface="Malgun Gothic"/>
+              </a:rPr>
+              <a:t>관절 각도와 힘.</a:t>
+            </a:r>
+            <a:r>
+              <a:rPr sz="1400" b="0" i="0">
+                <a:solidFill>
+                  <a:srgbClr val="11202B"/>
+                </a:solidFill>
+                <a:latin typeface="Malgun Gothic"/>
+                <a:ea typeface="Malgun Gothic"/>
+                <a:cs typeface="Malgun Gothic"/>
+              </a:rPr>
+              <a:t> 같은 근육이라도 관절 각도에 따라 낼 수 있는 토크가 달라진다. 두 요인이 겹친다. 하나는 7절의 길이–장력 관계로, 각도에 따라 sarcomere 길이가 달라진다. 다른 하나는 모멘트 팔로, 각도에 따라 힘이 작용하는 지렛대의 길이가 달라진다. 두 곡선의 곱이 실제 토크 곡선이며, 그래서 팔씨름이나 역도에서 특정 각도에서 유독 힘이 약해지는 구간이 생긴다.</a:t>
+            </a:r>
+          </a:p>
+        </p:txBody>
+      </p:sp>
+    </p:spTree>
+  </p:cSld>
+  <p:clrMapOvr>
+    <a:masterClrMapping/>
+  </p:clrMapOvr>
+</p:sld>
+</file>
+
+<file path=ppt/slides/slide27.xml><?xml version="1.0" encoding="utf-8"?>
+<p:sld xmlns:a="http://schemas.openxmlformats.org/drawingml/2006/main" xmlns:p="http://schemas.openxmlformats.org/presentationml/2006/main" xmlns:r="http://schemas.openxmlformats.org/officeDocument/2006/relationships">
+  <p:cSld>
+    <p:spTree>
+      <p:nvGrpSpPr>
+        <p:cNvPr id="1" name=""/>
+        <p:cNvGrpSpPr/>
+        <p:nvPr/>
+      </p:nvGrpSpPr>
+      <p:grpSpPr/>
+      <p:sp>
+        <p:nvSpPr>
+          <p:cNvPr id="2" name="Rectangle 1"/>
+          <p:cNvSpPr/>
+          <p:nvPr/>
+        </p:nvSpPr>
+        <p:spPr>
+          <a:xfrm>
+            <a:off x="0" y="0"/>
+            <a:ext cx="12191695" cy="6858000"/>
+          </a:xfrm>
+          <a:prstGeom prst="rect">
+            <a:avLst/>
+          </a:prstGeom>
+          <a:solidFill>
+            <a:srgbClr val="F5F8F9"/>
+          </a:solidFill>
+          <a:ln>
+            <a:noFill/>
+          </a:ln>
+          <a:effectLst/>
+        </p:spPr>
+        <p:style>
+          <a:lnRef idx="1">
+            <a:schemeClr val="accent1"/>
+          </a:lnRef>
+          <a:fillRef idx="3">
+            <a:schemeClr val="accent1"/>
+          </a:fillRef>
+          <a:effectRef idx="2">
+            <a:schemeClr val="accent1"/>
+          </a:effectRef>
+          <a:fontRef idx="minor">
+            <a:schemeClr val="lt1"/>
+          </a:fontRef>
+        </p:style>
+        <p:txBody>
+          <a:bodyPr rtlCol="0" anchor="ctr"/>
+          <a:lstStyle/>
+          <a:p>
+            <a:pPr algn="ctr"/>
+          </a:p>
+        </p:txBody>
+      </p:sp>
+      <p:sp>
+        <p:nvSpPr>
+          <p:cNvPr id="3" name="Rectangle 2"/>
+          <p:cNvSpPr/>
+          <p:nvPr/>
+        </p:nvSpPr>
+        <p:spPr>
+          <a:xfrm>
+            <a:off x="0" y="0"/>
+            <a:ext cx="12191695" cy="960120"/>
+          </a:xfrm>
+          <a:prstGeom prst="rect">
+            <a:avLst/>
+          </a:prstGeom>
+          <a:solidFill>
+            <a:srgbClr val="003C71"/>
+          </a:solidFill>
+          <a:ln>
+            <a:noFill/>
+          </a:ln>
+          <a:effectLst/>
+        </p:spPr>
+        <p:style>
+          <a:lnRef idx="1">
+            <a:schemeClr val="accent1"/>
+          </a:lnRef>
+          <a:fillRef idx="3">
+            <a:schemeClr val="accent1"/>
+          </a:fillRef>
+          <a:effectRef idx="2">
+            <a:schemeClr val="accent1"/>
+          </a:effectRef>
+          <a:fontRef idx="minor">
+            <a:schemeClr val="lt1"/>
+          </a:fontRef>
+        </p:style>
+        <p:txBody>
+          <a:bodyPr rtlCol="0" anchor="ctr"/>
+          <a:lstStyle/>
+          <a:p>
+            <a:pPr algn="ctr"/>
+          </a:p>
+        </p:txBody>
+      </p:sp>
+      <p:sp>
+        <p:nvSpPr>
+          <p:cNvPr id="4" name="Rectangle 3"/>
+          <p:cNvSpPr/>
+          <p:nvPr/>
+        </p:nvSpPr>
+        <p:spPr>
+          <a:xfrm>
+            <a:off x="0" y="960120"/>
+            <a:ext cx="12191695" cy="54864"/>
+          </a:xfrm>
+          <a:prstGeom prst="rect">
+            <a:avLst/>
+          </a:prstGeom>
+          <a:solidFill>
+            <a:srgbClr val="F2B705"/>
+          </a:solidFill>
+          <a:ln>
+            <a:noFill/>
+          </a:ln>
+          <a:effectLst/>
+        </p:spPr>
+        <p:style>
+          <a:lnRef idx="1">
+            <a:schemeClr val="accent1"/>
+          </a:lnRef>
+          <a:fillRef idx="3">
+            <a:schemeClr val="accent1"/>
+          </a:fillRef>
+          <a:effectRef idx="2">
+            <a:schemeClr val="accent1"/>
+          </a:effectRef>
+          <a:fontRef idx="minor">
+            <a:schemeClr val="lt1"/>
+          </a:fontRef>
+        </p:style>
+        <p:txBody>
+          <a:bodyPr rtlCol="0" anchor="ctr"/>
+          <a:lstStyle/>
+          <a:p>
+            <a:pPr algn="ctr"/>
+          </a:p>
+        </p:txBody>
+      </p:sp>
+      <p:sp>
+        <p:nvSpPr>
+          <p:cNvPr id="5" name="TextBox 4"/>
+          <p:cNvSpPr txBox="1"/>
+          <p:nvPr/>
+        </p:nvSpPr>
+        <p:spPr>
+          <a:xfrm>
+            <a:off x="457200" y="109728"/>
+            <a:ext cx="11247120" cy="777240"/>
+          </a:xfrm>
+          <a:prstGeom prst="rect">
+            <a:avLst/>
+          </a:prstGeom>
+          <a:noFill/>
+        </p:spPr>
+        <p:txBody>
+          <a:bodyPr wrap="square" anchor="ctr">
+            <a:spAutoFit/>
+          </a:bodyPr>
+          <a:lstStyle/>
+          <a:p>
+            <a:r>
+              <a:rPr sz="1300" b="1" i="0">
+                <a:solidFill>
+                  <a:srgbClr val="F2B705"/>
+                </a:solidFill>
+                <a:latin typeface="Malgun Gothic"/>
+                <a:ea typeface="Malgun Gothic"/>
+                <a:cs typeface="Malgun Gothic"/>
+              </a:rPr>
+              <a:t>09   </a:t>
+            </a:r>
+            <a:r>
+              <a:rPr sz="2400" b="1" i="0">
+                <a:solidFill>
+                  <a:srgbClr val="FFFFFF"/>
+                </a:solidFill>
+                <a:latin typeface="Malgun Gothic"/>
+                <a:ea typeface="Malgun Gothic"/>
+                <a:cs typeface="Malgun Gothic"/>
+              </a:rPr>
+              <a:t>9. 근육과 뼈 — 움직임의 역학</a:t>
+            </a:r>
+          </a:p>
+        </p:txBody>
+      </p:sp>
+      <p:sp>
+        <p:nvSpPr>
+          <p:cNvPr id="6" name="TextBox 5"/>
+          <p:cNvSpPr txBox="1"/>
+          <p:nvPr/>
+        </p:nvSpPr>
+        <p:spPr>
+          <a:xfrm>
+            <a:off x="457200" y="6446520"/>
+            <a:ext cx="11247120" cy="301752"/>
+          </a:xfrm>
+          <a:prstGeom prst="rect">
+            <a:avLst/>
+          </a:prstGeom>
+          <a:noFill/>
+        </p:spPr>
+        <p:txBody>
+          <a:bodyPr wrap="square" anchor="ctr">
+            <a:spAutoFit/>
+          </a:bodyPr>
+          <a:lstStyle/>
+          <a:p>
+            <a:r>
+              <a:rPr sz="900" b="0" i="0">
+                <a:solidFill>
+                  <a:srgbClr val="66788A"/>
+                </a:solidFill>
+                <a:latin typeface="Malgun Gothic"/>
+                <a:ea typeface="Malgun Gothic"/>
+                <a:cs typeface="Malgun Gothic"/>
+              </a:rPr>
+              <a:t>M01-W03-L03  ·  근육 요약: 근육 유형·수축·운동</a:t>
+            </a:r>
+            <a:r>
+              <a:rPr sz="900" b="1" i="0">
+                <a:solidFill>
+                  <a:srgbClr val="003C71"/>
+                </a:solidFill>
+                <a:latin typeface="Malgun Gothic"/>
+                <a:ea typeface="Malgun Gothic"/>
+                <a:cs typeface="Malgun Gothic"/>
+              </a:rPr>
+              <a:t>      27</a:t>
+            </a:r>
+          </a:p>
+        </p:txBody>
+      </p:sp>
+      <p:sp>
+        <p:nvSpPr>
+          <p:cNvPr id="7" name="Rectangle 6"/>
+          <p:cNvSpPr/>
+          <p:nvPr/>
+        </p:nvSpPr>
+        <p:spPr>
+          <a:xfrm>
+            <a:off x="640080" y="1325880"/>
+            <a:ext cx="10881360" cy="1681480"/>
+          </a:xfrm>
+          <a:prstGeom prst="rect">
+            <a:avLst/>
+          </a:prstGeom>
+          <a:solidFill>
+            <a:srgbClr val="ECF6EC"/>
+          </a:solidFill>
+          <a:ln>
+            <a:noFill/>
+          </a:ln>
+          <a:effectLst/>
+        </p:spPr>
+        <p:style>
+          <a:lnRef idx="1">
+            <a:schemeClr val="accent1"/>
+          </a:lnRef>
+          <a:fillRef idx="3">
+            <a:schemeClr val="accent1"/>
+          </a:fillRef>
+          <a:effectRef idx="2">
+            <a:schemeClr val="accent1"/>
+          </a:effectRef>
+          <a:fontRef idx="minor">
+            <a:schemeClr val="lt1"/>
+          </a:fontRef>
+        </p:style>
+        <p:txBody>
+          <a:bodyPr rtlCol="0" anchor="ctr" wrap="square" lIns="228600" rIns="228600"/>
+          <a:lstStyle/>
+          <a:p>
+            <a:pPr algn="l"/>
+            <a:r>
+              <a:rPr sz="1200" b="1" i="0">
+                <a:solidFill>
+                  <a:srgbClr val="1E6B2C"/>
+                </a:solidFill>
+                <a:latin typeface="Malgun Gothic"/>
+                <a:ea typeface="Malgun Gothic"/>
+                <a:cs typeface="Malgun Gothic"/>
+              </a:rPr>
+              <a:t>시험에서 가려내는 지점   </a:t>
+            </a:r>
+            <a:r>
+              <a:rPr sz="1600" b="1" i="0">
+                <a:solidFill>
+                  <a:srgbClr val="11202B"/>
+                </a:solidFill>
+                <a:latin typeface="Malgun Gothic"/>
+                <a:ea typeface="Malgun Gothic"/>
+                <a:cs typeface="Malgun Gothic"/>
+              </a:rPr>
+              <a:t>시험에서 가려내는 지점</a:t>
+            </a:r>
+            <a:r>
+              <a:rPr sz="1600" b="0" i="0">
+                <a:solidFill>
+                  <a:srgbClr val="11202B"/>
+                </a:solidFill>
+                <a:latin typeface="Malgun Gothic"/>
+                <a:ea typeface="Malgun Gothic"/>
+                <a:cs typeface="Malgun Gothic"/>
+              </a:rPr>
+              <a:t> 근육의 작용을 외울 때는 </a:t>
+            </a:r>
+            <a:r>
+              <a:rPr sz="1600" b="1" i="0">
+                <a:solidFill>
+                  <a:srgbClr val="11202B"/>
+                </a:solidFill>
+                <a:latin typeface="Malgun Gothic"/>
+                <a:ea typeface="Malgun Gothic"/>
+                <a:cs typeface="Malgun Gothic"/>
+              </a:rPr>
+              <a:t>힘줄이 관절 축의 어느 쪽을 지나는가</a:t>
+            </a:r>
+            <a:r>
+              <a:rPr sz="1600" b="0" i="0">
+                <a:solidFill>
+                  <a:srgbClr val="11202B"/>
+                </a:solidFill>
+                <a:latin typeface="Malgun Gothic"/>
+                <a:ea typeface="Malgun Gothic"/>
+                <a:cs typeface="Malgun Gothic"/>
+              </a:rPr>
+              <a:t>를 보면 된다. 관절 축의 앞을 지나면 굽히고 뒤를 지나면 편다. 이 원리로 두 관절을 지나는 근육(이관절근)의 작용도 예측된다. 넙다리두갈래근은 엉덩관절 뒤와 무릎 뒤를 지나므로 엉덩관절을 펴고 무릎을 굽힌다. 또 이관절근은 한 관절에서 짧아지는 동안 다른 관절에서 늘어날 수 있어 </a:t>
+            </a:r>
+            <a:r>
+              <a:rPr sz="1600" b="1" i="0">
+                <a:solidFill>
+                  <a:srgbClr val="11202B"/>
+                </a:solidFill>
+                <a:latin typeface="Malgun Gothic"/>
+                <a:ea typeface="Malgun Gothic"/>
+                <a:cs typeface="Malgun Gothic"/>
+              </a:rPr>
+              <a:t>전체 길이 변화가 작게 유지</a:t>
+            </a:r>
+            <a:r>
+              <a:rPr sz="1600" b="0" i="0">
+                <a:solidFill>
+                  <a:srgbClr val="11202B"/>
+                </a:solidFill>
+                <a:latin typeface="Malgun Gothic"/>
+                <a:ea typeface="Malgun Gothic"/>
+                <a:cs typeface="Malgun Gothic"/>
+              </a:rPr>
+              <a:t>되며, 길이–장력 곡선의 유리한 구간에 머물 수 있다. 걷기와 달리기에서 에너지 효율이 높은 이유 가운데 하나다.</a:t>
+            </a:r>
+          </a:p>
+        </p:txBody>
+      </p:sp>
+    </p:spTree>
+  </p:cSld>
+  <p:clrMapOvr>
+    <a:masterClrMapping/>
+  </p:clrMapOvr>
+</p:sld>
+</file>
+
+<file path=ppt/slides/slide28.xml><?xml version="1.0" encoding="utf-8"?>
+<p:sld xmlns:a="http://schemas.openxmlformats.org/drawingml/2006/main" xmlns:p="http://schemas.openxmlformats.org/presentationml/2006/main" xmlns:r="http://schemas.openxmlformats.org/officeDocument/2006/relationships">
+  <p:cSld>
+    <p:spTree>
+      <p:nvGrpSpPr>
+        <p:cNvPr id="1" name=""/>
+        <p:cNvGrpSpPr/>
+        <p:nvPr/>
+      </p:nvGrpSpPr>
+      <p:grpSpPr/>
+      <p:sp>
+        <p:nvSpPr>
+          <p:cNvPr id="2" name="Rectangle 1"/>
+          <p:cNvSpPr/>
+          <p:nvPr/>
+        </p:nvSpPr>
+        <p:spPr>
+          <a:xfrm>
+            <a:off x="0" y="0"/>
+            <a:ext cx="12191695" cy="6858000"/>
+          </a:xfrm>
+          <a:prstGeom prst="rect">
+            <a:avLst/>
+          </a:prstGeom>
+          <a:solidFill>
+            <a:srgbClr val="F5F8F9"/>
+          </a:solidFill>
+          <a:ln>
+            <a:noFill/>
+          </a:ln>
+          <a:effectLst/>
+        </p:spPr>
+        <p:style>
+          <a:lnRef idx="1">
+            <a:schemeClr val="accent1"/>
+          </a:lnRef>
+          <a:fillRef idx="3">
+            <a:schemeClr val="accent1"/>
+          </a:fillRef>
+          <a:effectRef idx="2">
+            <a:schemeClr val="accent1"/>
+          </a:effectRef>
+          <a:fontRef idx="minor">
+            <a:schemeClr val="lt1"/>
+          </a:fontRef>
+        </p:style>
+        <p:txBody>
+          <a:bodyPr rtlCol="0" anchor="ctr"/>
+          <a:lstStyle/>
+          <a:p>
+            <a:pPr algn="ctr"/>
+          </a:p>
+        </p:txBody>
+      </p:sp>
+      <p:sp>
+        <p:nvSpPr>
+          <p:cNvPr id="3" name="Rectangle 2"/>
+          <p:cNvSpPr/>
+          <p:nvPr/>
+        </p:nvSpPr>
+        <p:spPr>
+          <a:xfrm>
+            <a:off x="0" y="0"/>
+            <a:ext cx="12191695" cy="960120"/>
+          </a:xfrm>
+          <a:prstGeom prst="rect">
+            <a:avLst/>
+          </a:prstGeom>
+          <a:solidFill>
+            <a:srgbClr val="003C71"/>
+          </a:solidFill>
+          <a:ln>
+            <a:noFill/>
+          </a:ln>
+          <a:effectLst/>
+        </p:spPr>
+        <p:style>
+          <a:lnRef idx="1">
+            <a:schemeClr val="accent1"/>
+          </a:lnRef>
+          <a:fillRef idx="3">
+            <a:schemeClr val="accent1"/>
+          </a:fillRef>
+          <a:effectRef idx="2">
+            <a:schemeClr val="accent1"/>
+          </a:effectRef>
+          <a:fontRef idx="minor">
+            <a:schemeClr val="lt1"/>
+          </a:fontRef>
+        </p:style>
+        <p:txBody>
+          <a:bodyPr rtlCol="0" anchor="ctr"/>
+          <a:lstStyle/>
+          <a:p>
+            <a:pPr algn="ctr"/>
+          </a:p>
+        </p:txBody>
+      </p:sp>
+      <p:sp>
+        <p:nvSpPr>
+          <p:cNvPr id="4" name="Rectangle 3"/>
+          <p:cNvSpPr/>
+          <p:nvPr/>
+        </p:nvSpPr>
+        <p:spPr>
+          <a:xfrm>
+            <a:off x="0" y="960120"/>
+            <a:ext cx="12191695" cy="54864"/>
+          </a:xfrm>
+          <a:prstGeom prst="rect">
+            <a:avLst/>
+          </a:prstGeom>
+          <a:solidFill>
+            <a:srgbClr val="F2B705"/>
+          </a:solidFill>
+          <a:ln>
+            <a:noFill/>
+          </a:ln>
+          <a:effectLst/>
+        </p:spPr>
+        <p:style>
+          <a:lnRef idx="1">
+            <a:schemeClr val="accent1"/>
+          </a:lnRef>
+          <a:fillRef idx="3">
+            <a:schemeClr val="accent1"/>
+          </a:fillRef>
+          <a:effectRef idx="2">
+            <a:schemeClr val="accent1"/>
+          </a:effectRef>
+          <a:fontRef idx="minor">
+            <a:schemeClr val="lt1"/>
+          </a:fontRef>
+        </p:style>
+        <p:txBody>
+          <a:bodyPr rtlCol="0" anchor="ctr"/>
+          <a:lstStyle/>
+          <a:p>
+            <a:pPr algn="ctr"/>
+          </a:p>
+        </p:txBody>
+      </p:sp>
+      <p:sp>
+        <p:nvSpPr>
+          <p:cNvPr id="5" name="TextBox 4"/>
+          <p:cNvSpPr txBox="1"/>
+          <p:nvPr/>
+        </p:nvSpPr>
+        <p:spPr>
+          <a:xfrm>
+            <a:off x="457200" y="109728"/>
+            <a:ext cx="11247120" cy="777240"/>
+          </a:xfrm>
+          <a:prstGeom prst="rect">
+            <a:avLst/>
+          </a:prstGeom>
+          <a:noFill/>
+        </p:spPr>
+        <p:txBody>
+          <a:bodyPr wrap="square" anchor="ctr">
+            <a:spAutoFit/>
+          </a:bodyPr>
+          <a:lstStyle/>
+          <a:p>
+            <a:r>
+              <a:rPr sz="1300" b="1" i="0">
+                <a:solidFill>
+                  <a:srgbClr val="F2B705"/>
+                </a:solidFill>
+                <a:latin typeface="Malgun Gothic"/>
+                <a:ea typeface="Malgun Gothic"/>
+                <a:cs typeface="Malgun Gothic"/>
+              </a:rPr>
+              <a:t>REFERENCES   </a:t>
+            </a:r>
+            <a:r>
+              <a:rPr sz="2400" b="1" i="0">
+                <a:solidFill>
+                  <a:srgbClr val="FFFFFF"/>
+                </a:solidFill>
+                <a:latin typeface="Malgun Gothic"/>
+                <a:ea typeface="Malgun Gothic"/>
+                <a:cs typeface="Malgun Gothic"/>
+              </a:rPr>
+              <a:t>참고문헌</a:t>
+            </a:r>
+          </a:p>
+        </p:txBody>
+      </p:sp>
+      <p:sp>
+        <p:nvSpPr>
+          <p:cNvPr id="6" name="TextBox 5"/>
+          <p:cNvSpPr txBox="1"/>
+          <p:nvPr/>
+        </p:nvSpPr>
+        <p:spPr>
+          <a:xfrm>
+            <a:off x="457200" y="6446520"/>
+            <a:ext cx="11247120" cy="301752"/>
+          </a:xfrm>
+          <a:prstGeom prst="rect">
+            <a:avLst/>
+          </a:prstGeom>
+          <a:noFill/>
+        </p:spPr>
+        <p:txBody>
+          <a:bodyPr wrap="square" anchor="ctr">
+            <a:spAutoFit/>
+          </a:bodyPr>
+          <a:lstStyle/>
+          <a:p>
+            <a:r>
+              <a:rPr sz="900" b="0" i="0">
+                <a:solidFill>
+                  <a:srgbClr val="66788A"/>
+                </a:solidFill>
+                <a:latin typeface="Malgun Gothic"/>
+                <a:ea typeface="Malgun Gothic"/>
+                <a:cs typeface="Malgun Gothic"/>
+              </a:rPr>
+              <a:t>M01-W03-L03  ·  근육 요약: 근육 유형·수축·운동</a:t>
+            </a:r>
+            <a:r>
+              <a:rPr sz="900" b="1" i="0">
+                <a:solidFill>
+                  <a:srgbClr val="003C71"/>
+                </a:solidFill>
+                <a:latin typeface="Malgun Gothic"/>
+                <a:ea typeface="Malgun Gothic"/>
+                <a:cs typeface="Malgun Gothic"/>
+              </a:rPr>
+              <a:t>      28</a:t>
             </a:r>
           </a:p>
         </p:txBody>
@@ -13388,6 +14656,35 @@
                 <a:cs typeface="Malgun Gothic"/>
               </a:rPr>
               <a:t>8. 수축의 역학</a:t>
+            </a:r>
+          </a:p>
+          <a:p>
+            <a:pPr>
+              <a:spcAft>
+                <a:spcPts val="900"/>
+              </a:spcAft>
+            </a:pPr>
+            <a:r>
+              <a:rPr sz="2000" b="1" i="0">
+                <a:solidFill>
+                  <a:srgbClr val="F2B705"/>
+                </a:solidFill>
+                <a:latin typeface="Malgun Gothic"/>
+                <a:ea typeface="Malgun Gothic"/>
+                <a:cs typeface="Malgun Gothic"/>
+              </a:rPr>
+              <a:t>9.  </a:t>
+            </a:r>
+            <a:r>
+              <a:rPr sz="2000" b="0" i="0">
+                <a:solidFill>
+                  <a:srgbClr val="11202B"/>
+                </a:solidFill>
+                <a:latin typeface="Malgun Gothic"/>
+                <a:ea typeface="Malgun Gothic"/>
+                <a:cs typeface="Malgun Gothic"/>
+              </a:rPr>
+              <a:t>9. 근육과 뼈 — 움직임의 역학</a:t>
             </a:r>
           </a:p>
         </p:txBody>

--- a/curriculum/M01/W03/L03/slides.pptx
+++ b/curriculum/M01/W03/L03/slides.pptx
@@ -6013,11 +6013,40 @@
                 <a:ea typeface="Malgun Gothic"/>
                 <a:cs typeface="Malgun Gothic"/>
               </a:rPr>
-              <a:t> ADP와 Pi를 쥔 myosin 머리가 actin에 결합한다. 이 상태의 머리는 "장전된" 상태로, 이미 ATP 가수분해 에너지를 구조 안에 저장하고 있다. 2. </a:t>
-            </a:r>
+              <a:t> ADP와 Pi를 쥔 myosin 머리가 actin에 결합한다. 이 상태의 머리는 "장전된" 상태로, 이미 ATP 가수분해 에너지를 구조 안에 저장하고 있다.</a:t>
+            </a:r>
+          </a:p>
+          <a:p>
+            <a:pPr>
+              <a:spcAft>
+                <a:spcPts val="900"/>
+              </a:spcAft>
+            </a:pPr>
             <a:r>
               <a:rPr sz="1600" b="1" i="0">
                 <a:solidFill>
+                  <a:srgbClr val="F2B705"/>
+                </a:solidFill>
+                <a:latin typeface="Malgun Gothic"/>
+                <a:ea typeface="Malgun Gothic"/>
+                <a:cs typeface="Malgun Gothic"/>
+              </a:rPr>
+              <a:t>•  </a:t>
+            </a:r>
+            <a:r>
+              <a:rPr sz="1600" b="0" i="0">
+                <a:solidFill>
+                  <a:srgbClr val="11202B"/>
+                </a:solidFill>
+                <a:latin typeface="Malgun Gothic"/>
+                <a:ea typeface="Malgun Gothic"/>
+                <a:cs typeface="Malgun Gothic"/>
+              </a:rPr>
+              <a:t>2. </a:t>
+            </a:r>
+            <a:r>
+              <a:rPr sz="1600" b="1" i="0">
+                <a:solidFill>
                   <a:srgbClr val="11202B"/>
                 </a:solidFill>
                 <a:latin typeface="Malgun Gothic"/>
@@ -6035,11 +6064,40 @@
                 <a:ea typeface="Malgun Gothic"/>
                 <a:cs typeface="Malgun Gothic"/>
               </a:rPr>
-              <a:t> Pi가 떨어져 나가면서 머리가 각도를 바꾸어 약 10 nm 당긴다. 가는 필라멘트가 가운데로 끌려 들어간다. 이어 ADP가 떨어진다. 3. </a:t>
-            </a:r>
+              <a:t> Pi가 떨어져 나가면서 머리가 각도를 바꾸어 약 10 nm 당긴다. 가는 필라멘트가 가운데로 끌려 들어간다. 이어 ADP가 떨어진다.</a:t>
+            </a:r>
+          </a:p>
+          <a:p>
+            <a:pPr>
+              <a:spcAft>
+                <a:spcPts val="900"/>
+              </a:spcAft>
+            </a:pPr>
             <a:r>
               <a:rPr sz="1600" b="1" i="0">
                 <a:solidFill>
+                  <a:srgbClr val="F2B705"/>
+                </a:solidFill>
+                <a:latin typeface="Malgun Gothic"/>
+                <a:ea typeface="Malgun Gothic"/>
+                <a:cs typeface="Malgun Gothic"/>
+              </a:rPr>
+              <a:t>•  </a:t>
+            </a:r>
+            <a:r>
+              <a:rPr sz="1600" b="0" i="0">
+                <a:solidFill>
+                  <a:srgbClr val="11202B"/>
+                </a:solidFill>
+                <a:latin typeface="Malgun Gothic"/>
+                <a:ea typeface="Malgun Gothic"/>
+                <a:cs typeface="Malgun Gothic"/>
+              </a:rPr>
+              <a:t>3. </a:t>
+            </a:r>
+            <a:r>
+              <a:rPr sz="1600" b="1" i="0">
+                <a:solidFill>
                   <a:srgbClr val="11202B"/>
                 </a:solidFill>
                 <a:latin typeface="Malgun Gothic"/>
@@ -6057,7 +6115,36 @@
                 <a:ea typeface="Malgun Gothic"/>
                 <a:cs typeface="Malgun Gothic"/>
               </a:rPr>
-              <a:t> 새 ATP가 myosin 머리에 결합하면 actin에 대한 친화도가 급격히 떨어져 머리가 떨어진다. 4. </a:t>
+              <a:t> 새 ATP가 myosin 머리에 결합하면 actin에 대한 친화도가 급격히 떨어져 머리가 떨어진다.</a:t>
+            </a:r>
+          </a:p>
+          <a:p>
+            <a:pPr>
+              <a:spcAft>
+                <a:spcPts val="900"/>
+              </a:spcAft>
+            </a:pPr>
+            <a:r>
+              <a:rPr sz="1600" b="1" i="0">
+                <a:solidFill>
+                  <a:srgbClr val="F2B705"/>
+                </a:solidFill>
+                <a:latin typeface="Malgun Gothic"/>
+                <a:ea typeface="Malgun Gothic"/>
+                <a:cs typeface="Malgun Gothic"/>
+              </a:rPr>
+              <a:t>•  </a:t>
+            </a:r>
+            <a:r>
+              <a:rPr sz="1600" b="0" i="0">
+                <a:solidFill>
+                  <a:srgbClr val="11202B"/>
+                </a:solidFill>
+                <a:latin typeface="Malgun Gothic"/>
+                <a:ea typeface="Malgun Gothic"/>
+                <a:cs typeface="Malgun Gothic"/>
+              </a:rPr>
+              <a:t>4. </a:t>
             </a:r>
             <a:r>
               <a:rPr sz="1600" b="1" i="0">
@@ -7160,11 +7247,40 @@
                 <a:ea typeface="Malgun Gothic"/>
                 <a:cs typeface="Malgun Gothic"/>
               </a:rPr>
-              <a:t>1. 신경근 접합부에서 아세틸콜린이 방출되어 근섬유막을 탈분극시킨다. 2. 활동전위가 근섬유막을 따라 퍼지고, </a:t>
-            </a:r>
+              <a:t>1. 신경근 접합부에서 아세틸콜린이 방출되어 근섬유막을 탈분극시킨다.</a:t>
+            </a:r>
+          </a:p>
+          <a:p>
+            <a:pPr>
+              <a:spcAft>
+                <a:spcPts val="900"/>
+              </a:spcAft>
+            </a:pPr>
             <a:r>
               <a:rPr sz="1400" b="1" i="0">
                 <a:solidFill>
+                  <a:srgbClr val="F2B705"/>
+                </a:solidFill>
+                <a:latin typeface="Malgun Gothic"/>
+                <a:ea typeface="Malgun Gothic"/>
+                <a:cs typeface="Malgun Gothic"/>
+              </a:rPr>
+              <a:t>•  </a:t>
+            </a:r>
+            <a:r>
+              <a:rPr sz="1400" b="0" i="0">
+                <a:solidFill>
+                  <a:srgbClr val="11202B"/>
+                </a:solidFill>
+                <a:latin typeface="Malgun Gothic"/>
+                <a:ea typeface="Malgun Gothic"/>
+                <a:cs typeface="Malgun Gothic"/>
+              </a:rPr>
+              <a:t>2. 활동전위가 근섬유막을 따라 퍼지고, </a:t>
+            </a:r>
+            <a:r>
+              <a:rPr sz="1400" b="1" i="0">
+                <a:solidFill>
                   <a:srgbClr val="11202B"/>
                 </a:solidFill>
                 <a:latin typeface="Malgun Gothic"/>
@@ -7204,11 +7320,40 @@
                 <a:ea typeface="Malgun Gothic"/>
                 <a:cs typeface="Malgun Gothic"/>
               </a:rPr>
-              <a:t> 전달된다. 3. T세관 막의 </a:t>
-            </a:r>
+              <a:t> 전달된다.</a:t>
+            </a:r>
+          </a:p>
+          <a:p>
+            <a:pPr>
+              <a:spcAft>
+                <a:spcPts val="900"/>
+              </a:spcAft>
+            </a:pPr>
             <a:r>
               <a:rPr sz="1400" b="1" i="0">
                 <a:solidFill>
+                  <a:srgbClr val="F2B705"/>
+                </a:solidFill>
+                <a:latin typeface="Malgun Gothic"/>
+                <a:ea typeface="Malgun Gothic"/>
+                <a:cs typeface="Malgun Gothic"/>
+              </a:rPr>
+              <a:t>•  </a:t>
+            </a:r>
+            <a:r>
+              <a:rPr sz="1400" b="0" i="0">
+                <a:solidFill>
+                  <a:srgbClr val="11202B"/>
+                </a:solidFill>
+                <a:latin typeface="Malgun Gothic"/>
+                <a:ea typeface="Malgun Gothic"/>
+                <a:cs typeface="Malgun Gothic"/>
+              </a:rPr>
+              <a:t>3. T세관 막의 </a:t>
+            </a:r>
+            <a:r>
+              <a:rPr sz="1400" b="1" i="0">
+                <a:solidFill>
                   <a:srgbClr val="11202B"/>
                 </a:solidFill>
                 <a:latin typeface="Malgun Gothic"/>
@@ -7226,11 +7371,40 @@
                 <a:ea typeface="Malgun Gothic"/>
                 <a:cs typeface="Malgun Gothic"/>
               </a:rPr>
-              <a:t>(dihydropyridine 수용체, 전압 센서)이 전압 변화를 감지한다. 4. 골격근에서는 DHPR이 sarcoplasmic reticulum 막의 </a:t>
-            </a:r>
+              <a:t>(dihydropyridine 수용체, 전압 센서)이 전압 변화를 감지한다.</a:t>
+            </a:r>
+          </a:p>
+          <a:p>
+            <a:pPr>
+              <a:spcAft>
+                <a:spcPts val="900"/>
+              </a:spcAft>
+            </a:pPr>
             <a:r>
               <a:rPr sz="1400" b="1" i="0">
                 <a:solidFill>
+                  <a:srgbClr val="F2B705"/>
+                </a:solidFill>
+                <a:latin typeface="Malgun Gothic"/>
+                <a:ea typeface="Malgun Gothic"/>
+                <a:cs typeface="Malgun Gothic"/>
+              </a:rPr>
+              <a:t>•  </a:t>
+            </a:r>
+            <a:r>
+              <a:rPr sz="1400" b="0" i="0">
+                <a:solidFill>
+                  <a:srgbClr val="11202B"/>
+                </a:solidFill>
+                <a:latin typeface="Malgun Gothic"/>
+                <a:ea typeface="Malgun Gothic"/>
+                <a:cs typeface="Malgun Gothic"/>
+              </a:rPr>
+              <a:t>4. 골격근에서는 DHPR이 sarcoplasmic reticulum 막의 </a:t>
+            </a:r>
+            <a:r>
+              <a:rPr sz="1400" b="1" i="0">
+                <a:solidFill>
                   <a:srgbClr val="11202B"/>
                 </a:solidFill>
                 <a:latin typeface="Malgun Gothic"/>
@@ -7270,7 +7444,65 @@
                 <a:ea typeface="Malgun Gothic"/>
                 <a:cs typeface="Malgun Gothic"/>
               </a:rPr>
-              <a:t>, 전압 센서의 구조 변화가 기계적으로 RyR을 연다. 5. SR에 저장된 Ca²⁺이 쏟아져 나와 troponin C에 결합하고 수축이 시작된다. 6. SERCA 펌프가 ATP를 써서 Ca²⁺을 SR로 되돌리면 이완한다.</a:t>
+              <a:t>, 전압 센서의 구조 변화가 기계적으로 RyR을 연다.</a:t>
+            </a:r>
+          </a:p>
+          <a:p>
+            <a:pPr>
+              <a:spcAft>
+                <a:spcPts val="900"/>
+              </a:spcAft>
+            </a:pPr>
+            <a:r>
+              <a:rPr sz="1400" b="1" i="0">
+                <a:solidFill>
+                  <a:srgbClr val="F2B705"/>
+                </a:solidFill>
+                <a:latin typeface="Malgun Gothic"/>
+                <a:ea typeface="Malgun Gothic"/>
+                <a:cs typeface="Malgun Gothic"/>
+              </a:rPr>
+              <a:t>•  </a:t>
+            </a:r>
+            <a:r>
+              <a:rPr sz="1400" b="0" i="0">
+                <a:solidFill>
+                  <a:srgbClr val="11202B"/>
+                </a:solidFill>
+                <a:latin typeface="Malgun Gothic"/>
+                <a:ea typeface="Malgun Gothic"/>
+                <a:cs typeface="Malgun Gothic"/>
+              </a:rPr>
+              <a:t>5. SR에 저장된 Ca²⁺이 쏟아져 나와 troponin C에 결합하고 수축이 시작된다.</a:t>
+            </a:r>
+          </a:p>
+          <a:p>
+            <a:pPr>
+              <a:spcAft>
+                <a:spcPts val="900"/>
+              </a:spcAft>
+            </a:pPr>
+            <a:r>
+              <a:rPr sz="1400" b="1" i="0">
+                <a:solidFill>
+                  <a:srgbClr val="F2B705"/>
+                </a:solidFill>
+                <a:latin typeface="Malgun Gothic"/>
+                <a:ea typeface="Malgun Gothic"/>
+                <a:cs typeface="Malgun Gothic"/>
+              </a:rPr>
+              <a:t>•  </a:t>
+            </a:r>
+            <a:r>
+              <a:rPr sz="1400" b="0" i="0">
+                <a:solidFill>
+                  <a:srgbClr val="11202B"/>
+                </a:solidFill>
+                <a:latin typeface="Malgun Gothic"/>
+                <a:ea typeface="Malgun Gothic"/>
+                <a:cs typeface="Malgun Gothic"/>
+              </a:rPr>
+              <a:t>6. SERCA 펌프가 ATP를 써서 Ca²⁺을 SR로 되돌리면 이완한다.</a:t>
             </a:r>
           </a:p>
           <a:p>

--- a/curriculum/M01/W03/L03/slides.pptx
+++ b/curriculum/M01/W03/L03/slides.pptx
@@ -14330,7 +14330,7 @@
                 <a:ea typeface="Malgun Gothic"/>
                 <a:cs typeface="Malgun Gothic"/>
               </a:rPr>
-              <a:t>M01-W01-L01 순환계 요약 — 심근의 수축과 Frank–Starling 기전</a:t>
+              <a:t>M01-W01-L01 순환계 요약: 심장·혈관·혈류와 항상성 — 심근의 수축과 Frank–Starling 기전</a:t>
             </a:r>
           </a:p>
           <a:p>
@@ -14359,7 +14359,7 @@
                 <a:ea typeface="Malgun Gothic"/>
                 <a:cs typeface="Malgun Gothic"/>
               </a:rPr>
-              <a:t>M01-W03-L02 동물행동 요약 — 운동신경세포, 반사궁, 근방추</a:t>
+              <a:t>M01-W03-L02 동물행동 요약: 감각·행동·학습과 적응 — 운동신경세포, 반사궁, 근방추</a:t>
             </a:r>
           </a:p>
           <a:p>
@@ -14388,7 +14388,7 @@
                 <a:ea typeface="Malgun Gothic"/>
                 <a:cs typeface="Malgun Gothic"/>
               </a:rPr>
-              <a:t>M01-W09-L02 생체에너지 — ATP와 자유에너지의 기본</a:t>
+              <a:t>M01-W09-L02 생체에너지: 자유에너지와 ATP — ATP와 자유에너지의 기본</a:t>
             </a:r>
           </a:p>
         </p:txBody>

--- a/curriculum/M01/W03/L03/slides.pptx
+++ b/curriculum/M01/W03/L03/slides.pptx
@@ -5461,7 +5461,7 @@
               </a:spcAft>
             </a:pPr>
             <a:r>
-              <a:rPr sz="1600" b="1" i="0">
+              <a:rPr sz="1400" b="1" i="0">
                 <a:solidFill>
                   <a:srgbClr val="F2B705"/>
                 </a:solidFill>
@@ -5472,15 +5472,37 @@
               <a:t>•  </a:t>
             </a:r>
             <a:r>
-              <a:rPr sz="1600" b="0" i="0">
-                <a:solidFill>
-                  <a:srgbClr val="11202B"/>
-                </a:solidFill>
-                <a:latin typeface="Malgun Gothic"/>
-                <a:ea typeface="Malgun Gothic"/>
-                <a:cs typeface="Malgun Gothic"/>
-              </a:rPr>
-              <a:t>근육이 짧아질 때 필라멘트 자체가 짧아진다고 생각하기 쉽다. 그러나 관찰은 다른 답을 가리킨다.</a:t>
+              <a:rPr sz="1400" b="0" i="0">
+                <a:solidFill>
+                  <a:srgbClr val="11202B"/>
+                </a:solidFill>
+                <a:latin typeface="Malgun Gothic"/>
+                <a:ea typeface="Malgun Gothic"/>
+                <a:cs typeface="Malgun Gothic"/>
+              </a:rPr>
+              <a:t>앞 절에서 sarcomere라는 반복 단위를 보았다. 이제 질문은 하나다. </a:t>
+            </a:r>
+            <a:r>
+              <a:rPr sz="1400" b="1" i="0">
+                <a:solidFill>
+                  <a:srgbClr val="11202B"/>
+                </a:solidFill>
+                <a:latin typeface="Malgun Gothic"/>
+                <a:ea typeface="Malgun Gothic"/>
+                <a:cs typeface="Malgun Gothic"/>
+              </a:rPr>
+              <a:t>근육이 짧아질 때 그 안에서 무엇이 짧아지는가.</a:t>
+            </a:r>
+            <a:r>
+              <a:rPr sz="1400" b="0" i="0">
+                <a:solidFill>
+                  <a:srgbClr val="11202B"/>
+                </a:solidFill>
+                <a:latin typeface="Malgun Gothic"/>
+                <a:ea typeface="Malgun Gothic"/>
+                <a:cs typeface="Malgun Gothic"/>
+              </a:rPr>
+              <a:t> 필라멘트 자체가 줄어든다고 생각하기 쉽지만, 현미경 관찰은 다른 답을 가리켰다. 이 절은 그 관찰이 어떻게 모형을 가렸는지를 다룬다.</a:t>
             </a:r>
           </a:p>
           <a:p>
@@ -5490,7 +5512,7 @@
               </a:spcAft>
             </a:pPr>
             <a:r>
-              <a:rPr sz="1600" b="1" i="0">
+              <a:rPr sz="1400" b="1" i="0">
                 <a:solidFill>
                   <a:srgbClr val="F2B705"/>
                 </a:solidFill>
@@ -5501,70 +5523,15 @@
               <a:t>•  </a:t>
             </a:r>
             <a:r>
-              <a:rPr sz="1600" b="1" i="0">
-                <a:solidFill>
-                  <a:srgbClr val="11202B"/>
-                </a:solidFill>
-                <a:latin typeface="Malgun Gothic"/>
-                <a:ea typeface="Malgun Gothic"/>
-                <a:cs typeface="Malgun Gothic"/>
-              </a:rPr>
-              <a:t>근거.</a:t>
-            </a:r>
-            <a:r>
-              <a:rPr sz="1600" b="0" i="0">
-                <a:solidFill>
-                  <a:srgbClr val="11202B"/>
-                </a:solidFill>
-                <a:latin typeface="Malgun Gothic"/>
-                <a:ea typeface="Malgun Gothic"/>
-                <a:cs typeface="Malgun Gothic"/>
-              </a:rPr>
-              <a:t> 수축하는 근육의 전자현미경 사진에서 </a:t>
-            </a:r>
-            <a:r>
-              <a:rPr sz="1600" b="1" i="0">
-                <a:solidFill>
-                  <a:srgbClr val="11202B"/>
-                </a:solidFill>
-                <a:latin typeface="Malgun Gothic"/>
-                <a:ea typeface="Malgun Gothic"/>
-                <a:cs typeface="Malgun Gothic"/>
-              </a:rPr>
-              <a:t>A대의 길이는 변하지 않고 I대와 H구역만 짧아진다.</a:t>
-            </a:r>
-            <a:r>
-              <a:rPr sz="1600" b="0" i="0">
-                <a:solidFill>
-                  <a:srgbClr val="11202B"/>
-                </a:solidFill>
-                <a:latin typeface="Malgun Gothic"/>
-                <a:ea typeface="Malgun Gothic"/>
-                <a:cs typeface="Malgun Gothic"/>
-              </a:rPr>
-              <a:t> A대는 굵은 필라멘트의 길이이므로, 굵은 필라멘트는 그대로다. I대는 가는 필라멘트 가운데 겹치지 않은 부분이고 H구역은 굵은 필라멘트 가운데 겹치지 않은 부분이므로, 둘이 함께 짧아진다는 것은 </a:t>
-            </a:r>
-            <a:r>
-              <a:rPr sz="1600" b="1" i="0">
-                <a:solidFill>
-                  <a:srgbClr val="11202B"/>
-                </a:solidFill>
-                <a:latin typeface="Malgun Gothic"/>
-                <a:ea typeface="Malgun Gothic"/>
-                <a:cs typeface="Malgun Gothic"/>
-              </a:rPr>
-              <a:t>겹친 정도가 늘었다</a:t>
-            </a:r>
-            <a:r>
-              <a:rPr sz="1600" b="0" i="0">
-                <a:solidFill>
-                  <a:srgbClr val="11202B"/>
-                </a:solidFill>
-                <a:latin typeface="Malgun Gothic"/>
-                <a:ea typeface="Malgun Gothic"/>
-                <a:cs typeface="Malgun Gothic"/>
-              </a:rPr>
-              <a:t>는 뜻이다.</a:t>
+              <a:rPr sz="1400" b="0" i="0">
+                <a:solidFill>
+                  <a:srgbClr val="11202B"/>
+                </a:solidFill>
+                <a:latin typeface="Malgun Gothic"/>
+                <a:ea typeface="Malgun Gothic"/>
+                <a:cs typeface="Malgun Gothic"/>
+              </a:rPr>
+              <a:t>근육이 짧아질 때 필라멘트 자체가 짧아진다고 생각하기 쉽다. 그러나 관찰은 다른 답을 가리킨다.</a:t>
             </a:r>
           </a:p>
           <a:p>
@@ -5574,7 +5541,7 @@
               </a:spcAft>
             </a:pPr>
             <a:r>
-              <a:rPr sz="1600" b="1" i="0">
+              <a:rPr sz="1400" b="1" i="0">
                 <a:solidFill>
                   <a:srgbClr val="F2B705"/>
                 </a:solidFill>
@@ -5585,37 +5552,70 @@
               <a:t>•  </a:t>
             </a:r>
             <a:r>
-              <a:rPr sz="1600" b="0" i="0">
-                <a:solidFill>
-                  <a:srgbClr val="11202B"/>
-                </a:solidFill>
-                <a:latin typeface="Malgun Gothic"/>
-                <a:ea typeface="Malgun Gothic"/>
-                <a:cs typeface="Malgun Gothic"/>
-              </a:rPr>
-              <a:t>결론은 하나다. 필라멘트의 길이는 변하지 않고 </a:t>
-            </a:r>
-            <a:r>
-              <a:rPr sz="1600" b="1" i="0">
-                <a:solidFill>
-                  <a:srgbClr val="11202B"/>
-                </a:solidFill>
-                <a:latin typeface="Malgun Gothic"/>
-                <a:ea typeface="Malgun Gothic"/>
-                <a:cs typeface="Malgun Gothic"/>
-              </a:rPr>
-              <a:t>서로 미끄러져 들어간다</a:t>
-            </a:r>
-            <a:r>
-              <a:rPr sz="1600" b="0" i="0">
-                <a:solidFill>
-                  <a:srgbClr val="11202B"/>
-                </a:solidFill>
-                <a:latin typeface="Malgun Gothic"/>
-                <a:ea typeface="Malgun Gothic"/>
-                <a:cs typeface="Malgun Gothic"/>
-              </a:rPr>
-              <a:t>. 이것이 미끄럼 필라멘트 모형이며, 1950년대에 두 연구 집단이 독립적으로 같은 해에 제안했다.</a:t>
+              <a:rPr sz="1400" b="1" i="0">
+                <a:solidFill>
+                  <a:srgbClr val="11202B"/>
+                </a:solidFill>
+                <a:latin typeface="Malgun Gothic"/>
+                <a:ea typeface="Malgun Gothic"/>
+                <a:cs typeface="Malgun Gothic"/>
+              </a:rPr>
+              <a:t>근거.</a:t>
+            </a:r>
+            <a:r>
+              <a:rPr sz="1400" b="0" i="0">
+                <a:solidFill>
+                  <a:srgbClr val="11202B"/>
+                </a:solidFill>
+                <a:latin typeface="Malgun Gothic"/>
+                <a:ea typeface="Malgun Gothic"/>
+                <a:cs typeface="Malgun Gothic"/>
+              </a:rPr>
+              <a:t> 수축하는 근육의 전자현미경 사진에서 </a:t>
+            </a:r>
+            <a:r>
+              <a:rPr sz="1400" b="1" i="0">
+                <a:solidFill>
+                  <a:srgbClr val="11202B"/>
+                </a:solidFill>
+                <a:latin typeface="Malgun Gothic"/>
+                <a:ea typeface="Malgun Gothic"/>
+                <a:cs typeface="Malgun Gothic"/>
+              </a:rPr>
+              <a:t>A대의 길이는 변하지 않고 I대와 H구역만 짧아진다.</a:t>
+            </a:r>
+            <a:r>
+              <a:rPr sz="1400" b="0" i="0">
+                <a:solidFill>
+                  <a:srgbClr val="11202B"/>
+                </a:solidFill>
+                <a:latin typeface="Malgun Gothic"/>
+                <a:ea typeface="Malgun Gothic"/>
+                <a:cs typeface="Malgun Gothic"/>
+              </a:rPr>
+              <a:t> A대는 굵은 필라멘트의 길이이므로, 굵은 필라멘트는 그대로다. I대는 가는 필라멘트 가운데 겹치지 않은 부분이고 H구역은 굵은 필라멘트 가운데 겹치지 않은 부분이므로, 둘이 함께 짧아진다는 것은 </a:t>
+            </a:r>
+            <a:r>
+              <a:rPr sz="1400" b="1" i="0">
+                <a:solidFill>
+                  <a:srgbClr val="11202B"/>
+                </a:solidFill>
+                <a:latin typeface="Malgun Gothic"/>
+                <a:ea typeface="Malgun Gothic"/>
+                <a:cs typeface="Malgun Gothic"/>
+              </a:rPr>
+              <a:t>겹친 정도가 늘었다</a:t>
+            </a:r>
+            <a:r>
+              <a:rPr sz="1400" b="0" i="0">
+                <a:solidFill>
+                  <a:srgbClr val="11202B"/>
+                </a:solidFill>
+                <a:latin typeface="Malgun Gothic"/>
+                <a:ea typeface="Malgun Gothic"/>
+                <a:cs typeface="Malgun Gothic"/>
+              </a:rPr>
+              <a:t>는 뜻이다.</a:t>
             </a:r>
           </a:p>
           <a:p>
@@ -5625,7 +5625,7 @@
               </a:spcAft>
             </a:pPr>
             <a:r>
-              <a:rPr sz="1600" b="1" i="0">
+              <a:rPr sz="1400" b="1" i="0">
                 <a:solidFill>
                   <a:srgbClr val="F2B705"/>
                 </a:solidFill>
@@ -5636,7 +5636,58 @@
               <a:t>•  </a:t>
             </a:r>
             <a:r>
-              <a:rPr sz="1600" b="0" i="0">
+              <a:rPr sz="1400" b="0" i="0">
+                <a:solidFill>
+                  <a:srgbClr val="11202B"/>
+                </a:solidFill>
+                <a:latin typeface="Malgun Gothic"/>
+                <a:ea typeface="Malgun Gothic"/>
+                <a:cs typeface="Malgun Gothic"/>
+              </a:rPr>
+              <a:t>결론은 하나다. 필라멘트의 길이는 변하지 않고 </a:t>
+            </a:r>
+            <a:r>
+              <a:rPr sz="1400" b="1" i="0">
+                <a:solidFill>
+                  <a:srgbClr val="11202B"/>
+                </a:solidFill>
+                <a:latin typeface="Malgun Gothic"/>
+                <a:ea typeface="Malgun Gothic"/>
+                <a:cs typeface="Malgun Gothic"/>
+              </a:rPr>
+              <a:t>서로 미끄러져 들어간다</a:t>
+            </a:r>
+            <a:r>
+              <a:rPr sz="1400" b="0" i="0">
+                <a:solidFill>
+                  <a:srgbClr val="11202B"/>
+                </a:solidFill>
+                <a:latin typeface="Malgun Gothic"/>
+                <a:ea typeface="Malgun Gothic"/>
+                <a:cs typeface="Malgun Gothic"/>
+              </a:rPr>
+              <a:t>. 이것이 미끄럼 필라멘트 모형이며, 1950년대에 두 연구 집단이 독립적으로 같은 해에 제안했다.</a:t>
+            </a:r>
+          </a:p>
+          <a:p>
+            <a:pPr>
+              <a:spcAft>
+                <a:spcPts val="900"/>
+              </a:spcAft>
+            </a:pPr>
+            <a:r>
+              <a:rPr sz="1400" b="1" i="0">
+                <a:solidFill>
+                  <a:srgbClr val="F2B705"/>
+                </a:solidFill>
+                <a:latin typeface="Malgun Gothic"/>
+                <a:ea typeface="Malgun Gothic"/>
+                <a:cs typeface="Malgun Gothic"/>
+              </a:rPr>
+              <a:t>•  </a:t>
+            </a:r>
+            <a:r>
+              <a:rPr sz="1400" b="0" i="0">
                 <a:solidFill>
                   <a:srgbClr val="11202B"/>
                 </a:solidFill>
@@ -5647,7 +5698,7 @@
               <a:t>이 모형이 중요한 이유는 수축을 </a:t>
             </a:r>
             <a:r>
-              <a:rPr sz="1600" b="1" i="0">
+              <a:rPr sz="1400" b="1" i="0">
                 <a:solidFill>
                   <a:srgbClr val="11202B"/>
                 </a:solidFill>
@@ -5658,7 +5709,7 @@
               <a:t>분자 수준의 질문으로 바꾸어 놓았기 때문</a:t>
             </a:r>
             <a:r>
-              <a:rPr sz="1600" b="0" i="0">
+              <a:rPr sz="1400" b="0" i="0">
                 <a:solidFill>
                   <a:srgbClr val="11202B"/>
                 </a:solidFill>
@@ -5943,7 +5994,7 @@
               </a:spcAft>
             </a:pPr>
             <a:r>
-              <a:rPr sz="1600" b="1" i="0">
+              <a:rPr sz="1400" b="1" i="0">
                 <a:solidFill>
                   <a:srgbClr val="F2B705"/>
                 </a:solidFill>
@@ -5954,15 +6005,37 @@
               <a:t>•  </a:t>
             </a:r>
             <a:r>
-              <a:rPr sz="1600" b="0" i="0">
-                <a:solidFill>
-                  <a:srgbClr val="11202B"/>
-                </a:solidFill>
-                <a:latin typeface="Malgun Gothic"/>
-                <a:ea typeface="Malgun Gothic"/>
-                <a:cs typeface="Malgun Gothic"/>
-              </a:rPr>
-              <a:t>Myosin 머리는 ATP 가수분해효소이면서 동시에 actin 결합 부위를 가진다. 두 성질이 맞물려 주기가 돌아간다. 네 단계로 정리한다.</a:t>
+              <a:rPr sz="1400" b="0" i="0">
+                <a:solidFill>
+                  <a:srgbClr val="11202B"/>
+                </a:solidFill>
+                <a:latin typeface="Malgun Gothic"/>
+                <a:ea typeface="Malgun Gothic"/>
+                <a:cs typeface="Malgun Gothic"/>
+              </a:rPr>
+              <a:t>앞 절에서 두 필라멘트가 서로 미끄러진다는 데까지 왔다. 그런데 미끄러진다는 것은 현상의 서술이지 기전이 아니다. </a:t>
+            </a:r>
+            <a:r>
+              <a:rPr sz="1400" b="1" i="0">
+                <a:solidFill>
+                  <a:srgbClr val="11202B"/>
+                </a:solidFill>
+                <a:latin typeface="Malgun Gothic"/>
+                <a:ea typeface="Malgun Gothic"/>
+                <a:cs typeface="Malgun Gothic"/>
+              </a:rPr>
+              <a:t>무엇이 무엇을 어떻게 당기는가.</a:t>
+            </a:r>
+            <a:r>
+              <a:rPr sz="1400" b="0" i="0">
+                <a:solidFill>
+                  <a:srgbClr val="11202B"/>
+                </a:solidFill>
+                <a:latin typeface="Malgun Gothic"/>
+                <a:ea typeface="Malgun Gothic"/>
+                <a:cs typeface="Malgun Gothic"/>
+              </a:rPr>
+              <a:t> 이 절은 그 당기는 일을 하는 분자 하나까지 내려가며, ATP가 어느 단계에서 쓰이는지를 함께 본다.</a:t>
             </a:r>
           </a:p>
           <a:p>
@@ -5972,7 +6045,7 @@
               </a:spcAft>
             </a:pPr>
             <a:r>
-              <a:rPr sz="1600" b="1" i="0">
+              <a:rPr sz="1400" b="1" i="0">
                 <a:solidFill>
                   <a:srgbClr val="F2B705"/>
                 </a:solidFill>
@@ -5983,37 +6056,15 @@
               <a:t>•  </a:t>
             </a:r>
             <a:r>
-              <a:rPr sz="1600" b="0" i="0">
-                <a:solidFill>
-                  <a:srgbClr val="11202B"/>
-                </a:solidFill>
-                <a:latin typeface="Malgun Gothic"/>
-                <a:ea typeface="Malgun Gothic"/>
-                <a:cs typeface="Malgun Gothic"/>
-              </a:rPr>
-              <a:t>1. </a:t>
-            </a:r>
-            <a:r>
-              <a:rPr sz="1600" b="1" i="0">
-                <a:solidFill>
-                  <a:srgbClr val="11202B"/>
-                </a:solidFill>
-                <a:latin typeface="Malgun Gothic"/>
-                <a:ea typeface="Malgun Gothic"/>
-                <a:cs typeface="Malgun Gothic"/>
-              </a:rPr>
-              <a:t>결합(attachment).</a:t>
-            </a:r>
-            <a:r>
-              <a:rPr sz="1600" b="0" i="0">
-                <a:solidFill>
-                  <a:srgbClr val="11202B"/>
-                </a:solidFill>
-                <a:latin typeface="Malgun Gothic"/>
-                <a:ea typeface="Malgun Gothic"/>
-                <a:cs typeface="Malgun Gothic"/>
-              </a:rPr>
-              <a:t> ADP와 Pi를 쥔 myosin 머리가 actin에 결합한다. 이 상태의 머리는 "장전된" 상태로, 이미 ATP 가수분해 에너지를 구조 안에 저장하고 있다.</a:t>
+              <a:rPr sz="1400" b="0" i="0">
+                <a:solidFill>
+                  <a:srgbClr val="11202B"/>
+                </a:solidFill>
+                <a:latin typeface="Malgun Gothic"/>
+                <a:ea typeface="Malgun Gothic"/>
+                <a:cs typeface="Malgun Gothic"/>
+              </a:rPr>
+              <a:t>Myosin 머리는 ATP 가수분해효소이면서 동시에 actin 결합 부위를 가진다. 두 성질이 맞물려 주기가 돌아간다. 네 단계로 정리한다.</a:t>
             </a:r>
           </a:p>
           <a:p>
@@ -6023,7 +6074,7 @@
               </a:spcAft>
             </a:pPr>
             <a:r>
-              <a:rPr sz="1600" b="1" i="0">
+              <a:rPr sz="1400" b="1" i="0">
                 <a:solidFill>
                   <a:srgbClr val="F2B705"/>
                 </a:solidFill>
@@ -6034,37 +6085,37 @@
               <a:t>•  </a:t>
             </a:r>
             <a:r>
-              <a:rPr sz="1600" b="0" i="0">
-                <a:solidFill>
-                  <a:srgbClr val="11202B"/>
-                </a:solidFill>
-                <a:latin typeface="Malgun Gothic"/>
-                <a:ea typeface="Malgun Gothic"/>
-                <a:cs typeface="Malgun Gothic"/>
-              </a:rPr>
-              <a:t>2. </a:t>
-            </a:r>
-            <a:r>
-              <a:rPr sz="1600" b="1" i="0">
-                <a:solidFill>
-                  <a:srgbClr val="11202B"/>
-                </a:solidFill>
-                <a:latin typeface="Malgun Gothic"/>
-                <a:ea typeface="Malgun Gothic"/>
-                <a:cs typeface="Malgun Gothic"/>
-              </a:rPr>
-              <a:t>파워 스트로크(power stroke).</a:t>
-            </a:r>
-            <a:r>
-              <a:rPr sz="1600" b="0" i="0">
-                <a:solidFill>
-                  <a:srgbClr val="11202B"/>
-                </a:solidFill>
-                <a:latin typeface="Malgun Gothic"/>
-                <a:ea typeface="Malgun Gothic"/>
-                <a:cs typeface="Malgun Gothic"/>
-              </a:rPr>
-              <a:t> Pi가 떨어져 나가면서 머리가 각도를 바꾸어 약 10 nm 당긴다. 가는 필라멘트가 가운데로 끌려 들어간다. 이어 ADP가 떨어진다.</a:t>
+              <a:rPr sz="1400" b="0" i="0">
+                <a:solidFill>
+                  <a:srgbClr val="11202B"/>
+                </a:solidFill>
+                <a:latin typeface="Malgun Gothic"/>
+                <a:ea typeface="Malgun Gothic"/>
+                <a:cs typeface="Malgun Gothic"/>
+              </a:rPr>
+              <a:t>1. </a:t>
+            </a:r>
+            <a:r>
+              <a:rPr sz="1400" b="1" i="0">
+                <a:solidFill>
+                  <a:srgbClr val="11202B"/>
+                </a:solidFill>
+                <a:latin typeface="Malgun Gothic"/>
+                <a:ea typeface="Malgun Gothic"/>
+                <a:cs typeface="Malgun Gothic"/>
+              </a:rPr>
+              <a:t>결합(attachment).</a:t>
+            </a:r>
+            <a:r>
+              <a:rPr sz="1400" b="0" i="0">
+                <a:solidFill>
+                  <a:srgbClr val="11202B"/>
+                </a:solidFill>
+                <a:latin typeface="Malgun Gothic"/>
+                <a:ea typeface="Malgun Gothic"/>
+                <a:cs typeface="Malgun Gothic"/>
+              </a:rPr>
+              <a:t> ADP와 Pi를 쥔 myosin 머리가 actin에 결합한다. 이 상태의 머리는 "장전된" 상태로, 이미 ATP 가수분해 에너지를 구조 안에 저장하고 있다.</a:t>
             </a:r>
           </a:p>
           <a:p>
@@ -6074,7 +6125,7 @@
               </a:spcAft>
             </a:pPr>
             <a:r>
-              <a:rPr sz="1600" b="1" i="0">
+              <a:rPr sz="1400" b="1" i="0">
                 <a:solidFill>
                   <a:srgbClr val="F2B705"/>
                 </a:solidFill>
@@ -6085,37 +6136,37 @@
               <a:t>•  </a:t>
             </a:r>
             <a:r>
-              <a:rPr sz="1600" b="0" i="0">
-                <a:solidFill>
-                  <a:srgbClr val="11202B"/>
-                </a:solidFill>
-                <a:latin typeface="Malgun Gothic"/>
-                <a:ea typeface="Malgun Gothic"/>
-                <a:cs typeface="Malgun Gothic"/>
-              </a:rPr>
-              <a:t>3. </a:t>
-            </a:r>
-            <a:r>
-              <a:rPr sz="1600" b="1" i="0">
-                <a:solidFill>
-                  <a:srgbClr val="11202B"/>
-                </a:solidFill>
-                <a:latin typeface="Malgun Gothic"/>
-                <a:ea typeface="Malgun Gothic"/>
-                <a:cs typeface="Malgun Gothic"/>
-              </a:rPr>
-              <a:t>분리(detachment).</a:t>
-            </a:r>
-            <a:r>
-              <a:rPr sz="1600" b="0" i="0">
-                <a:solidFill>
-                  <a:srgbClr val="11202B"/>
-                </a:solidFill>
-                <a:latin typeface="Malgun Gothic"/>
-                <a:ea typeface="Malgun Gothic"/>
-                <a:cs typeface="Malgun Gothic"/>
-              </a:rPr>
-              <a:t> 새 ATP가 myosin 머리에 결합하면 actin에 대한 친화도가 급격히 떨어져 머리가 떨어진다.</a:t>
+              <a:rPr sz="1400" b="0" i="0">
+                <a:solidFill>
+                  <a:srgbClr val="11202B"/>
+                </a:solidFill>
+                <a:latin typeface="Malgun Gothic"/>
+                <a:ea typeface="Malgun Gothic"/>
+                <a:cs typeface="Malgun Gothic"/>
+              </a:rPr>
+              <a:t>2. </a:t>
+            </a:r>
+            <a:r>
+              <a:rPr sz="1400" b="1" i="0">
+                <a:solidFill>
+                  <a:srgbClr val="11202B"/>
+                </a:solidFill>
+                <a:latin typeface="Malgun Gothic"/>
+                <a:ea typeface="Malgun Gothic"/>
+                <a:cs typeface="Malgun Gothic"/>
+              </a:rPr>
+              <a:t>파워 스트로크(power stroke).</a:t>
+            </a:r>
+            <a:r>
+              <a:rPr sz="1400" b="0" i="0">
+                <a:solidFill>
+                  <a:srgbClr val="11202B"/>
+                </a:solidFill>
+                <a:latin typeface="Malgun Gothic"/>
+                <a:ea typeface="Malgun Gothic"/>
+                <a:cs typeface="Malgun Gothic"/>
+              </a:rPr>
+              <a:t> Pi가 떨어져 나가면서 머리가 각도를 바꾸어 약 10 nm 당긴다. 가는 필라멘트가 가운데로 끌려 들어간다. 이어 ADP가 떨어진다.</a:t>
             </a:r>
           </a:p>
           <a:p>
@@ -6125,7 +6176,7 @@
               </a:spcAft>
             </a:pPr>
             <a:r>
-              <a:rPr sz="1600" b="1" i="0">
+              <a:rPr sz="1400" b="1" i="0">
                 <a:solidFill>
                   <a:srgbClr val="F2B705"/>
                 </a:solidFill>
@@ -6136,37 +6187,37 @@
               <a:t>•  </a:t>
             </a:r>
             <a:r>
-              <a:rPr sz="1600" b="0" i="0">
-                <a:solidFill>
-                  <a:srgbClr val="11202B"/>
-                </a:solidFill>
-                <a:latin typeface="Malgun Gothic"/>
-                <a:ea typeface="Malgun Gothic"/>
-                <a:cs typeface="Malgun Gothic"/>
-              </a:rPr>
-              <a:t>4. </a:t>
-            </a:r>
-            <a:r>
-              <a:rPr sz="1600" b="1" i="0">
-                <a:solidFill>
-                  <a:srgbClr val="11202B"/>
-                </a:solidFill>
-                <a:latin typeface="Malgun Gothic"/>
-                <a:ea typeface="Malgun Gothic"/>
-                <a:cs typeface="Malgun Gothic"/>
-              </a:rPr>
-              <a:t>재장전(cocking).</a:t>
-            </a:r>
-            <a:r>
-              <a:rPr sz="1600" b="0" i="0">
-                <a:solidFill>
-                  <a:srgbClr val="11202B"/>
-                </a:solidFill>
-                <a:latin typeface="Malgun Gothic"/>
-                <a:ea typeface="Malgun Gothic"/>
-                <a:cs typeface="Malgun Gothic"/>
-              </a:rPr>
-              <a:t> 머리가 ATP를 ADP와 Pi로 가수분해하고, 그 에너지로 원래 각도로 되돌아간다. 다시 1번으로 간다.</a:t>
+              <a:rPr sz="1400" b="0" i="0">
+                <a:solidFill>
+                  <a:srgbClr val="11202B"/>
+                </a:solidFill>
+                <a:latin typeface="Malgun Gothic"/>
+                <a:ea typeface="Malgun Gothic"/>
+                <a:cs typeface="Malgun Gothic"/>
+              </a:rPr>
+              <a:t>3. </a:t>
+            </a:r>
+            <a:r>
+              <a:rPr sz="1400" b="1" i="0">
+                <a:solidFill>
+                  <a:srgbClr val="11202B"/>
+                </a:solidFill>
+                <a:latin typeface="Malgun Gothic"/>
+                <a:ea typeface="Malgun Gothic"/>
+                <a:cs typeface="Malgun Gothic"/>
+              </a:rPr>
+              <a:t>분리(detachment).</a:t>
+            </a:r>
+            <a:r>
+              <a:rPr sz="1400" b="0" i="0">
+                <a:solidFill>
+                  <a:srgbClr val="11202B"/>
+                </a:solidFill>
+                <a:latin typeface="Malgun Gothic"/>
+                <a:ea typeface="Malgun Gothic"/>
+                <a:cs typeface="Malgun Gothic"/>
+              </a:rPr>
+              <a:t> 새 ATP가 myosin 머리에 결합하면 actin에 대한 친화도가 급격히 떨어져 머리가 떨어진다.</a:t>
             </a:r>
           </a:p>
           <a:p>
@@ -6176,7 +6227,7 @@
               </a:spcAft>
             </a:pPr>
             <a:r>
-              <a:rPr sz="1600" b="1" i="0">
+              <a:rPr sz="1400" b="1" i="0">
                 <a:solidFill>
                   <a:srgbClr val="F2B705"/>
                 </a:solidFill>
@@ -6187,7 +6238,58 @@
               <a:t>•  </a:t>
             </a:r>
             <a:r>
-              <a:rPr sz="1600" b="1" i="0">
+              <a:rPr sz="1400" b="0" i="0">
+                <a:solidFill>
+                  <a:srgbClr val="11202B"/>
+                </a:solidFill>
+                <a:latin typeface="Malgun Gothic"/>
+                <a:ea typeface="Malgun Gothic"/>
+                <a:cs typeface="Malgun Gothic"/>
+              </a:rPr>
+              <a:t>4. </a:t>
+            </a:r>
+            <a:r>
+              <a:rPr sz="1400" b="1" i="0">
+                <a:solidFill>
+                  <a:srgbClr val="11202B"/>
+                </a:solidFill>
+                <a:latin typeface="Malgun Gothic"/>
+                <a:ea typeface="Malgun Gothic"/>
+                <a:cs typeface="Malgun Gothic"/>
+              </a:rPr>
+              <a:t>재장전(cocking).</a:t>
+            </a:r>
+            <a:r>
+              <a:rPr sz="1400" b="0" i="0">
+                <a:solidFill>
+                  <a:srgbClr val="11202B"/>
+                </a:solidFill>
+                <a:latin typeface="Malgun Gothic"/>
+                <a:ea typeface="Malgun Gothic"/>
+                <a:cs typeface="Malgun Gothic"/>
+              </a:rPr>
+              <a:t> 머리가 ATP를 ADP와 Pi로 가수분해하고, 그 에너지로 원래 각도로 되돌아간다. 다시 1번으로 간다.</a:t>
+            </a:r>
+          </a:p>
+          <a:p>
+            <a:pPr>
+              <a:spcAft>
+                <a:spcPts val="900"/>
+              </a:spcAft>
+            </a:pPr>
+            <a:r>
+              <a:rPr sz="1400" b="1" i="0">
+                <a:solidFill>
+                  <a:srgbClr val="F2B705"/>
+                </a:solidFill>
+                <a:latin typeface="Malgun Gothic"/>
+                <a:ea typeface="Malgun Gothic"/>
+                <a:cs typeface="Malgun Gothic"/>
+              </a:rPr>
+              <a:t>•  </a:t>
+            </a:r>
+            <a:r>
+              <a:rPr sz="1400" b="1" i="0">
                 <a:solidFill>
                   <a:srgbClr val="11202B"/>
                 </a:solidFill>
@@ -6198,7 +6300,7 @@
               <a:t>ATP가 두 곳에서 쓰인다는 점이 핵심이다.</a:t>
             </a:r>
             <a:r>
-              <a:rPr sz="1600" b="0" i="0">
+              <a:rPr sz="1400" b="0" i="0">
                 <a:solidFill>
                   <a:srgbClr val="11202B"/>
                 </a:solidFill>
@@ -6209,7 +6311,7 @@
               <a:t> 하나는 4단계의 재장전에서 쓰이고, 다른 하나는 3단계에서 </a:t>
             </a:r>
             <a:r>
-              <a:rPr sz="1600" b="1" i="0">
+              <a:rPr sz="1400" b="1" i="0">
                 <a:solidFill>
                   <a:srgbClr val="11202B"/>
                 </a:solidFill>
@@ -6220,7 +6322,7 @@
               <a:t>결합한 머리를 떼어 내는 데</a:t>
             </a:r>
             <a:r>
-              <a:rPr sz="1600" b="0" i="0">
+              <a:rPr sz="1400" b="0" i="0">
                 <a:solidFill>
                   <a:srgbClr val="11202B"/>
                 </a:solidFill>
@@ -6231,7 +6333,7 @@
               <a:t> 쓰인다. 두 번째 역할이 직관에 반한다. ATP는 당기는 데 쓰이는 것이 아니라 </a:t>
             </a:r>
             <a:r>
-              <a:rPr sz="1600" b="1" i="0">
+              <a:rPr sz="1400" b="1" i="0">
                 <a:solidFill>
                   <a:srgbClr val="11202B"/>
                 </a:solidFill>
@@ -6242,7 +6344,7 @@
               <a:t>놓는 데</a:t>
             </a:r>
             <a:r>
-              <a:rPr sz="1600" b="0" i="0">
+              <a:rPr sz="1400" b="0" i="0">
                 <a:solidFill>
                   <a:srgbClr val="11202B"/>
                 </a:solidFill>
@@ -7218,6 +7320,57 @@
                 <a:ea typeface="Malgun Gothic"/>
                 <a:cs typeface="Malgun Gothic"/>
               </a:rPr>
+              <a:t>앞 절에서 분자가 당기는 주기를 보았다. 그 주기를 켜고 끄는 스위치가 Ca²⁺였다. 그러면 남는 질문은 </a:t>
+            </a:r>
+            <a:r>
+              <a:rPr sz="1400" b="1" i="0">
+                <a:solidFill>
+                  <a:srgbClr val="11202B"/>
+                </a:solidFill>
+                <a:latin typeface="Malgun Gothic"/>
+                <a:ea typeface="Malgun Gothic"/>
+                <a:cs typeface="Malgun Gothic"/>
+              </a:rPr>
+              <a:t>신경의 신호가 어떻게 Ca²⁺ 농도의 변화로 번역되는가</a:t>
+            </a:r>
+            <a:r>
+              <a:rPr sz="1400" b="0" i="0">
+                <a:solidFill>
+                  <a:srgbClr val="11202B"/>
+                </a:solidFill>
+                <a:latin typeface="Malgun Gothic"/>
+                <a:ea typeface="Malgun Gothic"/>
+                <a:cs typeface="Malgun Gothic"/>
+              </a:rPr>
+              <a:t>이다. 전기 신호와 화학 스위치를 잇는 이 구간이 이 절의 주제이며, 근육 질환과 마취제의 작용점이 여기에 몰려 있다.</a:t>
+            </a:r>
+          </a:p>
+          <a:p>
+            <a:pPr>
+              <a:spcAft>
+                <a:spcPts val="900"/>
+              </a:spcAft>
+            </a:pPr>
+            <a:r>
+              <a:rPr sz="1400" b="1" i="0">
+                <a:solidFill>
+                  <a:srgbClr val="F2B705"/>
+                </a:solidFill>
+                <a:latin typeface="Malgun Gothic"/>
+                <a:ea typeface="Malgun Gothic"/>
+                <a:cs typeface="Malgun Gothic"/>
+              </a:rPr>
+              <a:t>•  </a:t>
+            </a:r>
+            <a:r>
+              <a:rPr sz="1400" b="0" i="0">
+                <a:solidFill>
+                  <a:srgbClr val="11202B"/>
+                </a:solidFill>
+                <a:latin typeface="Malgun Gothic"/>
+                <a:ea typeface="Malgun Gothic"/>
+                <a:cs typeface="Malgun Gothic"/>
+              </a:rPr>
               <a:t>운동신경의 신호가 어떻게 Ca²⁺ 방출로 이어지는지를 추적한다. 골격근의 경로는 다음과 같다.</a:t>
             </a:r>
           </a:p>
@@ -9345,6 +9498,46 @@
               <a:t>•  </a:t>
             </a:r>
             <a:r>
+              <a:rPr sz="1400" b="0" i="0">
+                <a:solidFill>
+                  <a:srgbClr val="11202B"/>
+                </a:solidFill>
+                <a:latin typeface="Malgun Gothic"/>
+                <a:ea typeface="Malgun Gothic"/>
+                <a:cs typeface="Malgun Gothic"/>
+              </a:rPr>
+              <a:t>앞 절은 신호가 근섬유막에 도착한 다음의 이야기였다. 그러면 그 신호는 어떻게 거기까지 오는가. 이 절은 한 칸 더 거슬러 올라가 신경과 근육이 만나는 자리를 다룬다. 또 하나의 질문도 함께 다룬다. 근섬유 하나하나를 따로 조절하지 않는다면 </a:t>
+            </a:r>
+            <a:r>
+              <a:rPr sz="1400" b="1" i="0">
+                <a:solidFill>
+                  <a:srgbClr val="11202B"/>
+                </a:solidFill>
+                <a:latin typeface="Malgun Gothic"/>
+                <a:ea typeface="Malgun Gothic"/>
+                <a:cs typeface="Malgun Gothic"/>
+              </a:rPr>
+              <a:t>힘의 세기는 어떻게 조절하는가.</a:t>
+            </a:r>
+          </a:p>
+          <a:p>
+            <a:pPr>
+              <a:spcAft>
+                <a:spcPts val="900"/>
+              </a:spcAft>
+            </a:pPr>
+            <a:r>
+              <a:rPr sz="1400" b="1" i="0">
+                <a:solidFill>
+                  <a:srgbClr val="F2B705"/>
+                </a:solidFill>
+                <a:latin typeface="Malgun Gothic"/>
+                <a:ea typeface="Malgun Gothic"/>
+                <a:cs typeface="Malgun Gothic"/>
+              </a:rPr>
+              <a:t>•  </a:t>
+            </a:r>
+            <a:r>
               <a:rPr sz="1400" b="1" i="0">
                 <a:solidFill>
                   <a:srgbClr val="11202B"/>
@@ -10799,6 +10992,57 @@
                 <a:ea typeface="Malgun Gothic"/>
                 <a:cs typeface="Malgun Gothic"/>
               </a:rPr>
+              <a:t>지금까지는 모두 </a:t>
+            </a:r>
+            <a:r>
+              <a:rPr sz="1400" b="1" i="0">
+                <a:solidFill>
+                  <a:srgbClr val="11202B"/>
+                </a:solidFill>
+                <a:latin typeface="Malgun Gothic"/>
+                <a:ea typeface="Malgun Gothic"/>
+                <a:cs typeface="Malgun Gothic"/>
+              </a:rPr>
+              <a:t>켜는</a:t>
+            </a:r>
+            <a:r>
+              <a:rPr sz="1400" b="0" i="0">
+                <a:solidFill>
+                  <a:srgbClr val="11202B"/>
+                </a:solidFill>
+                <a:latin typeface="Malgun Gothic"/>
+                <a:ea typeface="Malgun Gothic"/>
+                <a:cs typeface="Malgun Gothic"/>
+              </a:rPr>
+              <a:t> 쪽이었다. 그런데 근육이 수축한 채로 풀리지 않으면 아무 일도 할 수 없다. 끄는 일은 켜는 일만큼 중요하고, 뜻밖에도 에너지가 더 많이 든다. 이 절은 그 이유와, 끄는 일이 실패했을 때 각 근육에서 무엇이 일어나는지를 다룬다.</a:t>
+            </a:r>
+          </a:p>
+          <a:p>
+            <a:pPr>
+              <a:spcAft>
+                <a:spcPts val="900"/>
+              </a:spcAft>
+            </a:pPr>
+            <a:r>
+              <a:rPr sz="1400" b="1" i="0">
+                <a:solidFill>
+                  <a:srgbClr val="F2B705"/>
+                </a:solidFill>
+                <a:latin typeface="Malgun Gothic"/>
+                <a:ea typeface="Malgun Gothic"/>
+                <a:cs typeface="Malgun Gothic"/>
+              </a:rPr>
+              <a:t>•  </a:t>
+            </a:r>
+            <a:r>
+              <a:rPr sz="1400" b="0" i="0">
+                <a:solidFill>
+                  <a:srgbClr val="11202B"/>
+                </a:solidFill>
+                <a:latin typeface="Malgun Gothic"/>
+                <a:ea typeface="Malgun Gothic"/>
+                <a:cs typeface="Malgun Gothic"/>
+              </a:rPr>
               <a:t>수축을 끄는 일은 켜는 일만큼 중요하고, 에너지도 더 많이 든다. 이완이 실패하면 근육이 풀리지 않고, 심장에서는 충만이 되지 않으며, 혈관에서는 긴장이 유지된다.</a:t>
             </a:r>
           </a:p>
@@ -11714,6 +11958,57 @@
               <a:t>•  </a:t>
             </a:r>
             <a:r>
+              <a:rPr sz="1400" b="0" i="0">
+                <a:solidFill>
+                  <a:srgbClr val="11202B"/>
+                </a:solidFill>
+                <a:latin typeface="Malgun Gothic"/>
+                <a:ea typeface="Malgun Gothic"/>
+                <a:cs typeface="Malgun Gothic"/>
+              </a:rPr>
+              <a:t>여기까지로 한 번의 수축이 어떻게 켜지고 꺼지는지를 다 보았다. 그런데 실제 움직임은 한 번의 수축으로 이루어지지 않는다. 신호가 연달아 오고, 근육의 길이도 그때그때 다르다. 이 절은 </a:t>
+            </a:r>
+            <a:r>
+              <a:rPr sz="1400" b="1" i="0">
+                <a:solidFill>
+                  <a:srgbClr val="11202B"/>
+                </a:solidFill>
+                <a:latin typeface="Malgun Gothic"/>
+                <a:ea typeface="Malgun Gothic"/>
+                <a:cs typeface="Malgun Gothic"/>
+              </a:rPr>
+              <a:t>조건이 바뀌면 같은 근육이 내는 힘이 어떻게 달라지는지</a:t>
+            </a:r>
+            <a:r>
+              <a:rPr sz="1400" b="0" i="0">
+                <a:solidFill>
+                  <a:srgbClr val="11202B"/>
+                </a:solidFill>
+                <a:latin typeface="Malgun Gothic"/>
+                <a:ea typeface="Malgun Gothic"/>
+                <a:cs typeface="Malgun Gothic"/>
+              </a:rPr>
+              <a:t>를 다룬다.</a:t>
+            </a:r>
+          </a:p>
+          <a:p>
+            <a:pPr>
+              <a:spcAft>
+                <a:spcPts val="900"/>
+              </a:spcAft>
+            </a:pPr>
+            <a:r>
+              <a:rPr sz="1400" b="1" i="0">
+                <a:solidFill>
+                  <a:srgbClr val="F2B705"/>
+                </a:solidFill>
+                <a:latin typeface="Malgun Gothic"/>
+                <a:ea typeface="Malgun Gothic"/>
+                <a:cs typeface="Malgun Gothic"/>
+              </a:rPr>
+              <a:t>•  </a:t>
+            </a:r>
+            <a:r>
               <a:rPr sz="1400" b="1" i="0">
                 <a:solidFill>
                   <a:srgbClr val="11202B"/>
@@ -12539,6 +12834,35 @@
             <a:spAutoFit/>
           </a:bodyPr>
           <a:lstStyle/>
+          <a:p>
+            <a:pPr>
+              <a:spcAft>
+                <a:spcPts val="900"/>
+              </a:spcAft>
+            </a:pPr>
+            <a:r>
+              <a:rPr sz="1400" b="1" i="0">
+                <a:solidFill>
+                  <a:srgbClr val="F2B705"/>
+                </a:solidFill>
+                <a:latin typeface="Malgun Gothic"/>
+                <a:ea typeface="Malgun Gothic"/>
+                <a:cs typeface="Malgun Gothic"/>
+              </a:rPr>
+              <a:t>•  </a:t>
+            </a:r>
+            <a:r>
+              <a:rPr sz="1400" b="0" i="0">
+                <a:solidFill>
+                  <a:srgbClr val="11202B"/>
+                </a:solidFill>
+                <a:latin typeface="Malgun Gothic"/>
+                <a:ea typeface="Malgun Gothic"/>
+                <a:cs typeface="Malgun Gothic"/>
+              </a:rPr>
+              <a:t>앞 절까지는 근육이 내는 힘 자체를 다루었다. 그런데 그 힘이 곧 몸이 내는 힘은 아니다. 힘은 뼈라는 지렛대를 거쳐 전달되고, 그 과정에서 크기와 속도가 서로 바뀐다. 근육이 아주 센데도 들 수 있는 무게가 생각보다 작은 이유가 여기에 있다.</a:t>
+            </a:r>
+          </a:p>
           <a:p>
             <a:pPr>
               <a:spcAft>
@@ -17497,6 +17821,57 @@
                 <a:ea typeface="Malgun Gothic"/>
                 <a:cs typeface="Malgun Gothic"/>
               </a:rPr>
+              <a:t>앞 절에서 근육이 화학 에너지를 기계적 일로 바꾸는 장치라고 했다. 그 변환이 실제로 어디서 일어나는지를 알려면 구조부터 보아야 한다. 근육의 구조에서 가장 중요한 점은 </a:t>
+            </a:r>
+            <a:r>
+              <a:rPr sz="1400" b="1" i="0">
+                <a:solidFill>
+                  <a:srgbClr val="11202B"/>
+                </a:solidFill>
+                <a:latin typeface="Malgun Gothic"/>
+                <a:ea typeface="Malgun Gothic"/>
+                <a:cs typeface="Malgun Gothic"/>
+              </a:rPr>
+              <a:t>같은 단위가 반복된다는 것</a:t>
+            </a:r>
+            <a:r>
+              <a:rPr sz="1400" b="0" i="0">
+                <a:solidFill>
+                  <a:srgbClr val="11202B"/>
+                </a:solidFill>
+                <a:latin typeface="Malgun Gothic"/>
+                <a:ea typeface="Malgun Gothic"/>
+                <a:cs typeface="Malgun Gothic"/>
+              </a:rPr>
+              <a:t>이다. 이 반복이 왜 중요한지는 3절에서 드러난다.</a:t>
+            </a:r>
+          </a:p>
+          <a:p>
+            <a:pPr>
+              <a:spcAft>
+                <a:spcPts val="900"/>
+              </a:spcAft>
+            </a:pPr>
+            <a:r>
+              <a:rPr sz="1400" b="1" i="0">
+                <a:solidFill>
+                  <a:srgbClr val="F2B705"/>
+                </a:solidFill>
+                <a:latin typeface="Malgun Gothic"/>
+                <a:ea typeface="Malgun Gothic"/>
+                <a:cs typeface="Malgun Gothic"/>
+              </a:rPr>
+              <a:t>•  </a:t>
+            </a:r>
+            <a:r>
+              <a:rPr sz="1400" b="0" i="0">
+                <a:solidFill>
+                  <a:srgbClr val="11202B"/>
+                </a:solidFill>
+                <a:latin typeface="Malgun Gothic"/>
+                <a:ea typeface="Malgun Gothic"/>
+                <a:cs typeface="Malgun Gothic"/>
+              </a:rPr>
               <a:t>골격근은 여러 수준의 다발 구조로 되어 있다. 각 수준마다 결합조직이 감싸고, 이 결합조직이 모여 힘줄이 되어 뼈에 붙는다.</a:t>
             </a:r>
           </a:p>
